--- a/template/Cluster2_Daily_Report_BLANK_Template.pptx
+++ b/template/Cluster2_Daily_Report_BLANK_Template.pptx
@@ -1297,6 +1297,10 @@
           </a:solidFill>
           <a:ln/>
         </p:spPr>
+        <p:txBody>
+          <a:bodyPr/>
+          <a:p/>
+        </p:txBody>
       </p:sp>
       <p:sp>
         <p:nvSpPr>
@@ -1436,6 +1440,10 @@
           </a:solidFill>
           <a:ln/>
         </p:spPr>
+        <p:txBody>
+          <a:bodyPr/>
+          <a:p/>
+        </p:txBody>
       </p:sp>
       <p:sp>
         <p:nvSpPr>
@@ -1575,6 +1583,10 @@
           </a:solidFill>
           <a:ln/>
         </p:spPr>
+        <p:txBody>
+          <a:bodyPr/>
+          <a:p/>
+        </p:txBody>
       </p:sp>
       <p:sp>
         <p:nvSpPr>
@@ -1712,6 +1724,10 @@
           </a:solidFill>
           <a:ln/>
         </p:spPr>
+        <p:txBody>
+          <a:bodyPr/>
+          <a:p/>
+        </p:txBody>
       </p:sp>
       <p:sp>
         <p:nvSpPr>
@@ -1771,6 +1787,10 @@
           </a:solidFill>
           <a:ln/>
         </p:spPr>
+        <p:txBody>
+          <a:bodyPr/>
+          <a:p/>
+        </p:txBody>
       </p:sp>
       <p:sp>
         <p:nvSpPr>
@@ -2025,6 +2045,10 @@
           </a:solidFill>
           <a:ln/>
         </p:spPr>
+        <p:txBody>
+          <a:bodyPr/>
+          <a:p/>
+        </p:txBody>
       </p:sp>
       <p:sp>
         <p:nvSpPr>
@@ -2242,6 +2266,10 @@
           </a:solidFill>
           <a:ln/>
         </p:spPr>
+        <p:txBody>
+          <a:bodyPr/>
+          <a:p/>
+        </p:txBody>
       </p:sp>
       <p:sp>
         <p:nvSpPr>
@@ -2498,6 +2526,10 @@
           </a:solidFill>
           <a:ln/>
         </p:spPr>
+        <p:txBody>
+          <a:bodyPr/>
+          <a:p/>
+        </p:txBody>
       </p:sp>
       <p:sp>
         <p:nvSpPr>
@@ -2557,6 +2589,10 @@
           </a:solidFill>
           <a:ln/>
         </p:spPr>
+        <p:txBody>
+          <a:bodyPr/>
+          <a:p/>
+        </p:txBody>
       </p:sp>
       <p:sp>
         <p:nvSpPr>
@@ -2774,6 +2810,10 @@
           </a:solidFill>
           <a:ln/>
         </p:spPr>
+        <p:txBody>
+          <a:bodyPr/>
+          <a:p/>
+        </p:txBody>
       </p:sp>
       <p:sp>
         <p:nvSpPr>
@@ -3030,6 +3070,10 @@
           </a:solidFill>
           <a:ln/>
         </p:spPr>
+        <p:txBody>
+          <a:bodyPr/>
+          <a:p/>
+        </p:txBody>
       </p:sp>
       <p:sp>
         <p:nvSpPr>
@@ -3091,6 +3135,10 @@
           </a:solidFill>
           <a:ln/>
         </p:spPr>
+        <p:txBody>
+          <a:bodyPr/>
+          <a:p/>
+        </p:txBody>
       </p:sp>
       <p:sp>
         <p:nvSpPr>
@@ -3474,6 +3522,10 @@
           </a:solidFill>
           <a:ln/>
         </p:spPr>
+        <p:txBody>
+          <a:bodyPr/>
+          <a:p/>
+        </p:txBody>
       </p:sp>
       <p:sp>
         <p:nvSpPr>
@@ -3762,6 +3814,10 @@
             <a:prstDash val="solid"/>
           </a:ln>
         </p:spPr>
+        <p:txBody>
+          <a:bodyPr/>
+          <a:p/>
+        </p:txBody>
       </p:sp>
       <p:sp>
         <p:nvSpPr>
@@ -3785,6 +3841,10 @@
             <a:prstDash val="solid"/>
           </a:ln>
         </p:spPr>
+        <p:txBody>
+          <a:bodyPr/>
+          <a:p/>
+        </p:txBody>
       </p:sp>
       <p:sp>
         <p:nvSpPr>
@@ -3807,6 +3867,10 @@
           </a:solidFill>
           <a:ln/>
         </p:spPr>
+        <p:txBody>
+          <a:bodyPr/>
+          <a:p/>
+        </p:txBody>
       </p:sp>
       <p:sp>
         <p:nvSpPr>
@@ -3894,6 +3958,10 @@
           </a:solidFill>
           <a:ln/>
         </p:spPr>
+        <p:txBody>
+          <a:bodyPr/>
+          <a:p/>
+        </p:txBody>
       </p:sp>
       <p:sp>
         <p:nvSpPr>
@@ -3953,6 +4021,10 @@
           </a:solidFill>
           <a:ln/>
         </p:spPr>
+        <p:txBody>
+          <a:bodyPr/>
+          <a:p/>
+        </p:txBody>
       </p:sp>
       <p:sp>
         <p:nvSpPr>
@@ -4012,6 +4084,10 @@
           </a:solidFill>
           <a:ln/>
         </p:spPr>
+        <p:txBody>
+          <a:bodyPr/>
+          <a:p/>
+        </p:txBody>
       </p:sp>
       <p:sp>
         <p:nvSpPr>
@@ -4071,6 +4147,10 @@
           </a:solidFill>
           <a:ln/>
         </p:spPr>
+        <p:txBody>
+          <a:bodyPr/>
+          <a:p/>
+        </p:txBody>
       </p:sp>
       <p:sp>
         <p:nvSpPr>
@@ -4081,7 +4161,7 @@
         <p:spPr>
           <a:xfrm>
             <a:off x="457200" y="2450592"/>
-            <a:ext cx="5029200" cy="201168"/>
+            <a:ext cx="3886200" cy="201168"/>
           </a:xfrm>
           <a:prstGeom prst="rect">
             <a:avLst/>
@@ -4119,8 +4199,8 @@
         </p:nvSpPr>
         <p:spPr>
           <a:xfrm>
-            <a:off x="5349240" y="2450592"/>
-            <a:ext cx="1920240" cy="201168"/>
+            <a:off x="4434840" y="2450592"/>
+            <a:ext cx="1600200" cy="201168"/>
           </a:xfrm>
           <a:prstGeom prst="rect">
             <a:avLst/>
@@ -4208,6 +4288,10 @@
           </a:solidFill>
           <a:ln/>
         </p:spPr>
+        <p:txBody>
+          <a:bodyPr/>
+          <a:p/>
+        </p:txBody>
       </p:sp>
       <p:sp>
         <p:nvSpPr>
@@ -4296,7 +4380,7 @@
         <p:spPr>
           <a:xfrm>
             <a:off x="457200" y="2871216"/>
-            <a:ext cx="5029200" cy="201168"/>
+            <a:ext cx="3886200" cy="201168"/>
           </a:xfrm>
           <a:prstGeom prst="rect">
             <a:avLst/>
@@ -4334,8 +4418,8 @@
         </p:nvSpPr>
         <p:spPr>
           <a:xfrm>
-            <a:off x="5349240" y="2871216"/>
-            <a:ext cx="1920240" cy="201168"/>
+            <a:off x="4434840" y="2871216"/>
+            <a:ext cx="1600200" cy="201168"/>
           </a:xfrm>
           <a:prstGeom prst="rect">
             <a:avLst/>
@@ -4386,6 +4470,10 @@
           </a:solidFill>
           <a:ln/>
         </p:spPr>
+        <p:txBody>
+          <a:bodyPr/>
+          <a:p/>
+        </p:txBody>
       </p:sp>
       <p:sp>
         <p:nvSpPr>
@@ -4445,6 +4533,10 @@
           </a:solidFill>
           <a:ln/>
         </p:spPr>
+        <p:txBody>
+          <a:bodyPr/>
+          <a:p/>
+        </p:txBody>
       </p:sp>
       <p:sp>
         <p:nvSpPr>
@@ -4455,7 +4547,7 @@
         <p:spPr>
           <a:xfrm>
             <a:off x="457200" y="3072384"/>
-            <a:ext cx="5029200" cy="201168"/>
+            <a:ext cx="3886200" cy="201168"/>
           </a:xfrm>
           <a:prstGeom prst="rect">
             <a:avLst/>
@@ -4493,8 +4585,8 @@
         </p:nvSpPr>
         <p:spPr>
           <a:xfrm>
-            <a:off x="5349240" y="3072384"/>
-            <a:ext cx="1920240" cy="201168"/>
+            <a:off x="4434840" y="3072384"/>
+            <a:ext cx="1600200" cy="201168"/>
           </a:xfrm>
           <a:prstGeom prst="rect">
             <a:avLst/>
@@ -4545,6 +4637,10 @@
           </a:solidFill>
           <a:ln/>
         </p:spPr>
+        <p:txBody>
+          <a:bodyPr/>
+          <a:p/>
+        </p:txBody>
       </p:sp>
       <p:sp>
         <p:nvSpPr>
@@ -4594,7 +4690,7 @@
         <p:spPr>
           <a:xfrm>
             <a:off x="457200" y="3273552"/>
-            <a:ext cx="5029200" cy="201168"/>
+            <a:ext cx="3886200" cy="201168"/>
           </a:xfrm>
           <a:prstGeom prst="rect">
             <a:avLst/>
@@ -4632,8 +4728,8 @@
         </p:nvSpPr>
         <p:spPr>
           <a:xfrm>
-            <a:off x="5349240" y="3273552"/>
-            <a:ext cx="1920240" cy="201168"/>
+            <a:off x="4434840" y="3273552"/>
+            <a:ext cx="1600200" cy="201168"/>
           </a:xfrm>
           <a:prstGeom prst="rect">
             <a:avLst/>
@@ -4684,6 +4780,10 @@
           </a:solidFill>
           <a:ln/>
         </p:spPr>
+        <p:txBody>
+          <a:bodyPr/>
+          <a:p/>
+        </p:txBody>
       </p:sp>
       <p:sp>
         <p:nvSpPr>
@@ -4743,6 +4843,10 @@
           </a:solidFill>
           <a:ln/>
         </p:spPr>
+        <p:txBody>
+          <a:bodyPr/>
+          <a:p/>
+        </p:txBody>
       </p:sp>
       <p:sp>
         <p:nvSpPr>
@@ -4753,7 +4857,7 @@
         <p:spPr>
           <a:xfrm>
             <a:off x="457200" y="3474720"/>
-            <a:ext cx="5029200" cy="201168"/>
+            <a:ext cx="3886200" cy="201168"/>
           </a:xfrm>
           <a:prstGeom prst="rect">
             <a:avLst/>
@@ -4791,8 +4895,8 @@
         </p:nvSpPr>
         <p:spPr>
           <a:xfrm>
-            <a:off x="5349240" y="3474720"/>
-            <a:ext cx="1920240" cy="201168"/>
+            <a:off x="4434840" y="3474720"/>
+            <a:ext cx="1600200" cy="201168"/>
           </a:xfrm>
           <a:prstGeom prst="rect">
             <a:avLst/>
@@ -4843,6 +4947,10 @@
           </a:solidFill>
           <a:ln/>
         </p:spPr>
+        <p:txBody>
+          <a:bodyPr/>
+          <a:p/>
+        </p:txBody>
       </p:sp>
       <p:sp>
         <p:nvSpPr>
@@ -4902,6 +5010,10 @@
           </a:solidFill>
           <a:ln/>
         </p:spPr>
+        <p:txBody>
+          <a:bodyPr/>
+          <a:p/>
+        </p:txBody>
       </p:sp>
       <p:sp>
         <p:nvSpPr>
@@ -4990,7 +5102,7 @@
         <p:spPr>
           <a:xfrm>
             <a:off x="457200" y="3877056"/>
-            <a:ext cx="5029200" cy="201168"/>
+            <a:ext cx="3886200" cy="201168"/>
           </a:xfrm>
           <a:prstGeom prst="rect">
             <a:avLst/>
@@ -5028,8 +5140,8 @@
         </p:nvSpPr>
         <p:spPr>
           <a:xfrm>
-            <a:off x="5349240" y="3877056"/>
-            <a:ext cx="1920240" cy="201168"/>
+            <a:off x="4434840" y="3877056"/>
+            <a:ext cx="1600200" cy="201168"/>
           </a:xfrm>
           <a:prstGeom prst="rect">
             <a:avLst/>
@@ -5080,6 +5192,10 @@
           </a:solidFill>
           <a:ln/>
         </p:spPr>
+        <p:txBody>
+          <a:bodyPr/>
+          <a:p/>
+        </p:txBody>
       </p:sp>
       <p:sp>
         <p:nvSpPr>
@@ -5139,6 +5255,10 @@
           </a:solidFill>
           <a:ln/>
         </p:spPr>
+        <p:txBody>
+          <a:bodyPr/>
+          <a:p/>
+        </p:txBody>
       </p:sp>
       <p:sp>
         <p:nvSpPr>
@@ -5149,7 +5269,7 @@
         <p:spPr>
           <a:xfrm>
             <a:off x="457200" y="4078224"/>
-            <a:ext cx="5029200" cy="201168"/>
+            <a:ext cx="3886200" cy="201168"/>
           </a:xfrm>
           <a:prstGeom prst="rect">
             <a:avLst/>
@@ -5187,8 +5307,8 @@
         </p:nvSpPr>
         <p:spPr>
           <a:xfrm>
-            <a:off x="5349240" y="4078224"/>
-            <a:ext cx="1920240" cy="201168"/>
+            <a:off x="4434840" y="4078224"/>
+            <a:ext cx="1600200" cy="201168"/>
           </a:xfrm>
           <a:prstGeom prst="rect">
             <a:avLst/>
@@ -5239,6 +5359,10 @@
           </a:solidFill>
           <a:ln/>
         </p:spPr>
+        <p:txBody>
+          <a:bodyPr/>
+          <a:p/>
+        </p:txBody>
       </p:sp>
       <p:sp>
         <p:nvSpPr>
@@ -5288,7 +5412,7 @@
         <p:spPr>
           <a:xfrm>
             <a:off x="457200" y="4279392"/>
-            <a:ext cx="5029200" cy="201168"/>
+            <a:ext cx="3886200" cy="201168"/>
           </a:xfrm>
           <a:prstGeom prst="rect">
             <a:avLst/>
@@ -5326,8 +5450,8 @@
         </p:nvSpPr>
         <p:spPr>
           <a:xfrm>
-            <a:off x="5349240" y="4279392"/>
-            <a:ext cx="1920240" cy="201168"/>
+            <a:off x="4434840" y="4279392"/>
+            <a:ext cx="1600200" cy="201168"/>
           </a:xfrm>
           <a:prstGeom prst="rect">
             <a:avLst/>
@@ -5378,6 +5502,10 @@
           </a:solidFill>
           <a:ln/>
         </p:spPr>
+        <p:txBody>
+          <a:bodyPr/>
+          <a:p/>
+        </p:txBody>
       </p:sp>
       <p:sp>
         <p:nvSpPr>
@@ -5437,6 +5565,10 @@
           </a:solidFill>
           <a:ln/>
         </p:spPr>
+        <p:txBody>
+          <a:bodyPr/>
+          <a:p/>
+        </p:txBody>
       </p:sp>
       <p:sp>
         <p:nvSpPr>
@@ -5447,7 +5579,7 @@
         <p:spPr>
           <a:xfrm>
             <a:off x="457200" y="4480560"/>
-            <a:ext cx="5029200" cy="201168"/>
+            <a:ext cx="3886200" cy="201168"/>
           </a:xfrm>
           <a:prstGeom prst="rect">
             <a:avLst/>
@@ -5485,8 +5617,8 @@
         </p:nvSpPr>
         <p:spPr>
           <a:xfrm>
-            <a:off x="5349240" y="4480560"/>
-            <a:ext cx="1920240" cy="201168"/>
+            <a:off x="4434840" y="4480560"/>
+            <a:ext cx="1600200" cy="201168"/>
           </a:xfrm>
           <a:prstGeom prst="rect">
             <a:avLst/>
@@ -5537,6 +5669,10 @@
           </a:solidFill>
           <a:ln/>
         </p:spPr>
+        <p:txBody>
+          <a:bodyPr/>
+          <a:p/>
+        </p:txBody>
       </p:sp>
       <p:sp>
         <p:nvSpPr>
@@ -5652,6 +5788,357 @@
               <a:t>CONFIDENTIAL · Page 2</a:t>
             </a:r>
             <a:endParaRPr lang="en-US" sz="700" dirty="0"/>
+          </a:p>
+        </p:txBody>
+      </p:sp>
+      <p:sp>
+        <p:nvSpPr>
+          <p:cNvPr id="28" name="Text 25"/>
+          <p:cNvSpPr/>
+          <p:nvPr/>
+        </p:nvSpPr>
+        <p:spPr>
+          <a:xfrm>
+            <a:off x="6172200" y="2450592"/>
+            <a:ext cx="960120" cy="201168"/>
+          </a:xfrm>
+          <a:prstGeom prst="rect">
+            <a:avLst/>
+          </a:prstGeom>
+          <a:noFill/>
+          <a:ln/>
+        </p:spPr>
+        <p:txBody>
+          <a:bodyPr wrap="square" lIns="0" tIns="0" rIns="0" bIns="0" rtlCol="0" anchor="ctr"/>
+          <a:lstStyle/>
+          <a:p>
+            <a:pPr algn="ctr" indent="0" marL="0">
+              <a:buNone/>
+            </a:pPr>
+            <a:r>
+              <a:rPr lang="en-US" sz="800" b="1" spc="100" kern="0" dirty="0">
+                <a:solidFill>
+                  <a:srgbClr val="FFFFFF"/>
+                </a:solidFill>
+                <a:latin typeface="Plus Jakarta Sans" pitchFamily="34" charset="0"/>
+                <a:ea typeface="Plus Jakarta Sans" pitchFamily="34" charset="-122"/>
+                <a:cs typeface="Plus Jakarta Sans" pitchFamily="34" charset="-120"/>
+              </a:rPr>
+              <a:t>NO SHOW</a:t>
+            </a:r>
+            <a:endParaRPr lang="en-US" sz="800" dirty="0"/>
+          </a:p>
+        </p:txBody>
+      </p:sp>
+      <p:sp>
+        <p:nvSpPr>
+          <p:cNvPr id="34" name="Text 31"/>
+          <p:cNvSpPr/>
+          <p:nvPr/>
+        </p:nvSpPr>
+        <p:spPr>
+          <a:xfrm>
+            <a:off x="6172200" y="2871216"/>
+            <a:ext cx="960120" cy="201168"/>
+          </a:xfrm>
+          <a:prstGeom prst="rect">
+            <a:avLst/>
+          </a:prstGeom>
+          <a:noFill/>
+          <a:ln/>
+        </p:spPr>
+        <p:txBody>
+          <a:bodyPr wrap="square" lIns="0" tIns="0" rIns="0" bIns="0" rtlCol="0" anchor="ctr"/>
+          <a:lstStyle/>
+          <a:p>
+            <a:pPr algn="ctr" indent="0" marL="0">
+              <a:buNone/>
+            </a:pPr>
+            <a:r>
+              <a:rPr lang="en-US" sz="1000" dirty="0">
+                <a:solidFill>
+                  <a:srgbClr val="5A5470"/>
+                </a:solidFill>
+                <a:latin typeface="Times New Roman" pitchFamily="34" charset="0"/>
+                <a:ea typeface="Times New Roman" pitchFamily="34" charset="-122"/>
+                <a:cs typeface="Times New Roman" pitchFamily="34" charset="-120"/>
+              </a:rPr>
+              <a:t>—</a:t>
+            </a:r>
+            <a:endParaRPr lang="en-US" sz="1000" dirty="0"/>
+          </a:p>
+        </p:txBody>
+      </p:sp>
+      <p:sp>
+        <p:nvSpPr>
+          <p:cNvPr id="39" name="Text 36"/>
+          <p:cNvSpPr/>
+          <p:nvPr/>
+        </p:nvSpPr>
+        <p:spPr>
+          <a:xfrm>
+            <a:off x="6172200" y="3072384"/>
+            <a:ext cx="960120" cy="201168"/>
+          </a:xfrm>
+          <a:prstGeom prst="rect">
+            <a:avLst/>
+          </a:prstGeom>
+          <a:noFill/>
+          <a:ln/>
+        </p:spPr>
+        <p:txBody>
+          <a:bodyPr wrap="square" lIns="0" tIns="0" rIns="0" bIns="0" rtlCol="0" anchor="ctr"/>
+          <a:lstStyle/>
+          <a:p>
+            <a:pPr algn="ctr" indent="0" marL="0">
+              <a:buNone/>
+            </a:pPr>
+            <a:r>
+              <a:rPr lang="en-US" sz="1000" dirty="0">
+                <a:solidFill>
+                  <a:srgbClr val="5A5470"/>
+                </a:solidFill>
+                <a:latin typeface="Times New Roman" pitchFamily="34" charset="0"/>
+                <a:ea typeface="Times New Roman" pitchFamily="34" charset="-122"/>
+                <a:cs typeface="Times New Roman" pitchFamily="34" charset="-120"/>
+              </a:rPr>
+              <a:t>—</a:t>
+            </a:r>
+            <a:endParaRPr lang="en-US" sz="1000" dirty="0"/>
+          </a:p>
+        </p:txBody>
+      </p:sp>
+      <p:sp>
+        <p:nvSpPr>
+          <p:cNvPr id="43" name="Text 40"/>
+          <p:cNvSpPr/>
+          <p:nvPr/>
+        </p:nvSpPr>
+        <p:spPr>
+          <a:xfrm>
+            <a:off x="6172200" y="3273552"/>
+            <a:ext cx="960120" cy="201168"/>
+          </a:xfrm>
+          <a:prstGeom prst="rect">
+            <a:avLst/>
+          </a:prstGeom>
+          <a:noFill/>
+          <a:ln/>
+        </p:spPr>
+        <p:txBody>
+          <a:bodyPr wrap="square" lIns="0" tIns="0" rIns="0" bIns="0" rtlCol="0" anchor="ctr"/>
+          <a:lstStyle/>
+          <a:p>
+            <a:pPr algn="ctr" indent="0" marL="0">
+              <a:buNone/>
+            </a:pPr>
+            <a:r>
+              <a:rPr lang="en-US" sz="1000" dirty="0">
+                <a:solidFill>
+                  <a:srgbClr val="5A5470"/>
+                </a:solidFill>
+                <a:latin typeface="Times New Roman" pitchFamily="34" charset="0"/>
+                <a:ea typeface="Times New Roman" pitchFamily="34" charset="-122"/>
+                <a:cs typeface="Times New Roman" pitchFamily="34" charset="-120"/>
+              </a:rPr>
+              <a:t>—</a:t>
+            </a:r>
+            <a:endParaRPr lang="en-US" sz="1000" dirty="0"/>
+          </a:p>
+        </p:txBody>
+      </p:sp>
+      <p:sp>
+        <p:nvSpPr>
+          <p:cNvPr id="48" name="Text 45"/>
+          <p:cNvSpPr/>
+          <p:nvPr/>
+        </p:nvSpPr>
+        <p:spPr>
+          <a:xfrm>
+            <a:off x="6172200" y="3474720"/>
+            <a:ext cx="960120" cy="201168"/>
+          </a:xfrm>
+          <a:prstGeom prst="rect">
+            <a:avLst/>
+          </a:prstGeom>
+          <a:noFill/>
+          <a:ln/>
+        </p:spPr>
+        <p:txBody>
+          <a:bodyPr wrap="square" lIns="0" tIns="0" rIns="0" bIns="0" rtlCol="0" anchor="ctr"/>
+          <a:lstStyle/>
+          <a:p>
+            <a:pPr algn="ctr" indent="0" marL="0">
+              <a:buNone/>
+            </a:pPr>
+            <a:r>
+              <a:rPr lang="en-US" sz="1000" dirty="0">
+                <a:solidFill>
+                  <a:srgbClr val="5A5470"/>
+                </a:solidFill>
+                <a:latin typeface="Times New Roman" pitchFamily="34" charset="0"/>
+                <a:ea typeface="Times New Roman" pitchFamily="34" charset="-122"/>
+                <a:cs typeface="Times New Roman" pitchFamily="34" charset="-120"/>
+              </a:rPr>
+              <a:t>—</a:t>
+            </a:r>
+            <a:endParaRPr lang="en-US" sz="1000" dirty="0"/>
+          </a:p>
+        </p:txBody>
+      </p:sp>
+      <p:sp>
+        <p:nvSpPr>
+          <p:cNvPr id="55" name="Text 52"/>
+          <p:cNvSpPr/>
+          <p:nvPr/>
+        </p:nvSpPr>
+        <p:spPr>
+          <a:xfrm>
+            <a:off x="6172200" y="3877056"/>
+            <a:ext cx="960120" cy="201168"/>
+          </a:xfrm>
+          <a:prstGeom prst="rect">
+            <a:avLst/>
+          </a:prstGeom>
+          <a:noFill/>
+          <a:ln/>
+        </p:spPr>
+        <p:txBody>
+          <a:bodyPr wrap="square" lIns="0" tIns="0" rIns="0" bIns="0" rtlCol="0" anchor="ctr"/>
+          <a:lstStyle/>
+          <a:p>
+            <a:pPr algn="ctr" indent="0" marL="0">
+              <a:buNone/>
+            </a:pPr>
+            <a:r>
+              <a:rPr lang="en-US" sz="1000" dirty="0">
+                <a:solidFill>
+                  <a:srgbClr val="5A5470"/>
+                </a:solidFill>
+                <a:latin typeface="Times New Roman" pitchFamily="34" charset="0"/>
+                <a:ea typeface="Times New Roman" pitchFamily="34" charset="-122"/>
+                <a:cs typeface="Times New Roman" pitchFamily="34" charset="-120"/>
+              </a:rPr>
+              <a:t>—</a:t>
+            </a:r>
+            <a:endParaRPr lang="en-US" sz="1000" dirty="0"/>
+          </a:p>
+        </p:txBody>
+      </p:sp>
+      <p:sp>
+        <p:nvSpPr>
+          <p:cNvPr id="60" name="Text 57"/>
+          <p:cNvSpPr/>
+          <p:nvPr/>
+        </p:nvSpPr>
+        <p:spPr>
+          <a:xfrm>
+            <a:off x="6172200" y="4078224"/>
+            <a:ext cx="960120" cy="201168"/>
+          </a:xfrm>
+          <a:prstGeom prst="rect">
+            <a:avLst/>
+          </a:prstGeom>
+          <a:noFill/>
+          <a:ln/>
+        </p:spPr>
+        <p:txBody>
+          <a:bodyPr wrap="square" lIns="0" tIns="0" rIns="0" bIns="0" rtlCol="0" anchor="ctr"/>
+          <a:lstStyle/>
+          <a:p>
+            <a:pPr algn="ctr" indent="0" marL="0">
+              <a:buNone/>
+            </a:pPr>
+            <a:r>
+              <a:rPr lang="en-US" sz="1000" dirty="0">
+                <a:solidFill>
+                  <a:srgbClr val="5A5470"/>
+                </a:solidFill>
+                <a:latin typeface="Times New Roman" pitchFamily="34" charset="0"/>
+                <a:ea typeface="Times New Roman" pitchFamily="34" charset="-122"/>
+                <a:cs typeface="Times New Roman" pitchFamily="34" charset="-120"/>
+              </a:rPr>
+              <a:t>—</a:t>
+            </a:r>
+            <a:endParaRPr lang="en-US" sz="1000" dirty="0"/>
+          </a:p>
+        </p:txBody>
+      </p:sp>
+      <p:sp>
+        <p:nvSpPr>
+          <p:cNvPr id="64" name="Text 61"/>
+          <p:cNvSpPr/>
+          <p:nvPr/>
+        </p:nvSpPr>
+        <p:spPr>
+          <a:xfrm>
+            <a:off x="6172200" y="4279392"/>
+            <a:ext cx="960120" cy="201168"/>
+          </a:xfrm>
+          <a:prstGeom prst="rect">
+            <a:avLst/>
+          </a:prstGeom>
+          <a:noFill/>
+          <a:ln/>
+        </p:spPr>
+        <p:txBody>
+          <a:bodyPr wrap="square" lIns="0" tIns="0" rIns="0" bIns="0" rtlCol="0" anchor="ctr"/>
+          <a:lstStyle/>
+          <a:p>
+            <a:pPr algn="ctr" indent="0" marL="0">
+              <a:buNone/>
+            </a:pPr>
+            <a:r>
+              <a:rPr lang="en-US" sz="1000" dirty="0">
+                <a:solidFill>
+                  <a:srgbClr val="5A5470"/>
+                </a:solidFill>
+                <a:latin typeface="Times New Roman" pitchFamily="34" charset="0"/>
+                <a:ea typeface="Times New Roman" pitchFamily="34" charset="-122"/>
+                <a:cs typeface="Times New Roman" pitchFamily="34" charset="-120"/>
+              </a:rPr>
+              <a:t>—</a:t>
+            </a:r>
+            <a:endParaRPr lang="en-US" sz="1000" dirty="0"/>
+          </a:p>
+        </p:txBody>
+      </p:sp>
+      <p:sp>
+        <p:nvSpPr>
+          <p:cNvPr id="69" name="Text 66"/>
+          <p:cNvSpPr/>
+          <p:nvPr/>
+        </p:nvSpPr>
+        <p:spPr>
+          <a:xfrm>
+            <a:off x="6172200" y="4480560"/>
+            <a:ext cx="960120" cy="201168"/>
+          </a:xfrm>
+          <a:prstGeom prst="rect">
+            <a:avLst/>
+          </a:prstGeom>
+          <a:noFill/>
+          <a:ln/>
+        </p:spPr>
+        <p:txBody>
+          <a:bodyPr wrap="square" lIns="0" tIns="0" rIns="0" bIns="0" rtlCol="0" anchor="ctr"/>
+          <a:lstStyle/>
+          <a:p>
+            <a:pPr algn="ctr" indent="0" marL="0">
+              <a:buNone/>
+            </a:pPr>
+            <a:r>
+              <a:rPr lang="en-US" sz="1000" dirty="0">
+                <a:solidFill>
+                  <a:srgbClr val="5A5470"/>
+                </a:solidFill>
+                <a:latin typeface="Times New Roman" pitchFamily="34" charset="0"/>
+                <a:ea typeface="Times New Roman" pitchFamily="34" charset="-122"/>
+                <a:cs typeface="Times New Roman" pitchFamily="34" charset="-120"/>
+              </a:rPr>
+              <a:t>—</a:t>
+            </a:r>
+            <a:endParaRPr lang="en-US" sz="1000" dirty="0"/>
           </a:p>
         </p:txBody>
       </p:sp>
@@ -5890,6 +6377,10 @@
           </a:solidFill>
           <a:ln/>
         </p:spPr>
+        <p:txBody>
+          <a:bodyPr/>
+          <a:p/>
+        </p:txBody>
       </p:sp>
       <p:sp>
         <p:nvSpPr>
@@ -5900,7 +6391,7 @@
         <p:spPr>
           <a:xfrm>
             <a:off x="457200" y="1078992"/>
-            <a:ext cx="5029200" cy="201168"/>
+            <a:ext cx="3886200" cy="201168"/>
           </a:xfrm>
           <a:prstGeom prst="rect">
             <a:avLst/>
@@ -5938,8 +6429,8 @@
         </p:nvSpPr>
         <p:spPr>
           <a:xfrm>
-            <a:off x="5349240" y="1078992"/>
-            <a:ext cx="1920240" cy="201168"/>
+            <a:off x="4434840" y="1078992"/>
+            <a:ext cx="1600200" cy="201168"/>
           </a:xfrm>
           <a:prstGeom prst="rect">
             <a:avLst/>
@@ -6027,6 +6518,10 @@
           </a:solidFill>
           <a:ln/>
         </p:spPr>
+        <p:txBody>
+          <a:bodyPr/>
+          <a:p/>
+        </p:txBody>
       </p:sp>
       <p:sp>
         <p:nvSpPr>
@@ -6115,7 +6610,7 @@
         <p:spPr>
           <a:xfrm>
             <a:off x="457200" y="1499616"/>
-            <a:ext cx="5029200" cy="201168"/>
+            <a:ext cx="3886200" cy="201168"/>
           </a:xfrm>
           <a:prstGeom prst="rect">
             <a:avLst/>
@@ -6153,8 +6648,8 @@
         </p:nvSpPr>
         <p:spPr>
           <a:xfrm>
-            <a:off x="5349240" y="1499616"/>
-            <a:ext cx="1920240" cy="201168"/>
+            <a:off x="4434840" y="1499616"/>
+            <a:ext cx="1600200" cy="201168"/>
           </a:xfrm>
           <a:prstGeom prst="rect">
             <a:avLst/>
@@ -6205,6 +6700,10 @@
           </a:solidFill>
           <a:ln/>
         </p:spPr>
+        <p:txBody>
+          <a:bodyPr/>
+          <a:p/>
+        </p:txBody>
       </p:sp>
       <p:sp>
         <p:nvSpPr>
@@ -6264,6 +6763,10 @@
           </a:solidFill>
           <a:ln/>
         </p:spPr>
+        <p:txBody>
+          <a:bodyPr/>
+          <a:p/>
+        </p:txBody>
       </p:sp>
       <p:sp>
         <p:nvSpPr>
@@ -6274,7 +6777,7 @@
         <p:spPr>
           <a:xfrm>
             <a:off x="457200" y="1700784"/>
-            <a:ext cx="5029200" cy="201168"/>
+            <a:ext cx="3886200" cy="201168"/>
           </a:xfrm>
           <a:prstGeom prst="rect">
             <a:avLst/>
@@ -6312,8 +6815,8 @@
         </p:nvSpPr>
         <p:spPr>
           <a:xfrm>
-            <a:off x="5349240" y="1700784"/>
-            <a:ext cx="1920240" cy="201168"/>
+            <a:off x="4434840" y="1700784"/>
+            <a:ext cx="1600200" cy="201168"/>
           </a:xfrm>
           <a:prstGeom prst="rect">
             <a:avLst/>
@@ -6364,6 +6867,10 @@
           </a:solidFill>
           <a:ln/>
         </p:spPr>
+        <p:txBody>
+          <a:bodyPr/>
+          <a:p/>
+        </p:txBody>
       </p:sp>
       <p:sp>
         <p:nvSpPr>
@@ -6413,7 +6920,7 @@
         <p:spPr>
           <a:xfrm>
             <a:off x="457200" y="1901952"/>
-            <a:ext cx="5029200" cy="201168"/>
+            <a:ext cx="3886200" cy="201168"/>
           </a:xfrm>
           <a:prstGeom prst="rect">
             <a:avLst/>
@@ -6451,8 +6958,8 @@
         </p:nvSpPr>
         <p:spPr>
           <a:xfrm>
-            <a:off x="5349240" y="1901952"/>
-            <a:ext cx="1920240" cy="201168"/>
+            <a:off x="4434840" y="1901952"/>
+            <a:ext cx="1600200" cy="201168"/>
           </a:xfrm>
           <a:prstGeom prst="rect">
             <a:avLst/>
@@ -6503,6 +7010,10 @@
           </a:solidFill>
           <a:ln/>
         </p:spPr>
+        <p:txBody>
+          <a:bodyPr/>
+          <a:p/>
+        </p:txBody>
       </p:sp>
       <p:sp>
         <p:nvSpPr>
@@ -6562,6 +7073,10 @@
           </a:solidFill>
           <a:ln/>
         </p:spPr>
+        <p:txBody>
+          <a:bodyPr/>
+          <a:p/>
+        </p:txBody>
       </p:sp>
       <p:sp>
         <p:nvSpPr>
@@ -6572,7 +7087,7 @@
         <p:spPr>
           <a:xfrm>
             <a:off x="457200" y="2103120"/>
-            <a:ext cx="5029200" cy="201168"/>
+            <a:ext cx="3886200" cy="201168"/>
           </a:xfrm>
           <a:prstGeom prst="rect">
             <a:avLst/>
@@ -6610,8 +7125,8 @@
         </p:nvSpPr>
         <p:spPr>
           <a:xfrm>
-            <a:off x="5349240" y="2103120"/>
-            <a:ext cx="1920240" cy="201168"/>
+            <a:off x="4434840" y="2103120"/>
+            <a:ext cx="1600200" cy="201168"/>
           </a:xfrm>
           <a:prstGeom prst="rect">
             <a:avLst/>
@@ -6662,6 +7177,10 @@
           </a:solidFill>
           <a:ln/>
         </p:spPr>
+        <p:txBody>
+          <a:bodyPr/>
+          <a:p/>
+        </p:txBody>
       </p:sp>
       <p:sp>
         <p:nvSpPr>
@@ -6711,7 +7230,7 @@
         <p:spPr>
           <a:xfrm>
             <a:off x="457200" y="2304288"/>
-            <a:ext cx="5029200" cy="201168"/>
+            <a:ext cx="3886200" cy="201168"/>
           </a:xfrm>
           <a:prstGeom prst="rect">
             <a:avLst/>
@@ -6749,8 +7268,8 @@
         </p:nvSpPr>
         <p:spPr>
           <a:xfrm>
-            <a:off x="5349240" y="2304288"/>
-            <a:ext cx="1920240" cy="201168"/>
+            <a:off x="4434840" y="2304288"/>
+            <a:ext cx="1600200" cy="201168"/>
           </a:xfrm>
           <a:prstGeom prst="rect">
             <a:avLst/>
@@ -6801,6 +7320,10 @@
           </a:solidFill>
           <a:ln/>
         </p:spPr>
+        <p:txBody>
+          <a:bodyPr/>
+          <a:p/>
+        </p:txBody>
       </p:sp>
       <p:sp>
         <p:nvSpPr>
@@ -6860,6 +7383,10 @@
           </a:solidFill>
           <a:ln/>
         </p:spPr>
+        <p:txBody>
+          <a:bodyPr/>
+          <a:p/>
+        </p:txBody>
       </p:sp>
       <p:sp>
         <p:nvSpPr>
@@ -6870,7 +7397,7 @@
         <p:spPr>
           <a:xfrm>
             <a:off x="457200" y="2505456"/>
-            <a:ext cx="5029200" cy="201168"/>
+            <a:ext cx="3886200" cy="201168"/>
           </a:xfrm>
           <a:prstGeom prst="rect">
             <a:avLst/>
@@ -6908,8 +7435,8 @@
         </p:nvSpPr>
         <p:spPr>
           <a:xfrm>
-            <a:off x="5349240" y="2505456"/>
-            <a:ext cx="1920240" cy="201168"/>
+            <a:off x="4434840" y="2505456"/>
+            <a:ext cx="1600200" cy="201168"/>
           </a:xfrm>
           <a:prstGeom prst="rect">
             <a:avLst/>
@@ -6960,6 +7487,10 @@
           </a:solidFill>
           <a:ln/>
         </p:spPr>
+        <p:txBody>
+          <a:bodyPr/>
+          <a:p/>
+        </p:txBody>
       </p:sp>
       <p:sp>
         <p:nvSpPr>
@@ -7009,7 +7540,7 @@
         <p:spPr>
           <a:xfrm>
             <a:off x="457200" y="2706624"/>
-            <a:ext cx="5029200" cy="201168"/>
+            <a:ext cx="3886200" cy="201168"/>
           </a:xfrm>
           <a:prstGeom prst="rect">
             <a:avLst/>
@@ -7047,8 +7578,8 @@
         </p:nvSpPr>
         <p:spPr>
           <a:xfrm>
-            <a:off x="5349240" y="2706624"/>
-            <a:ext cx="1920240" cy="201168"/>
+            <a:off x="4434840" y="2706624"/>
+            <a:ext cx="1600200" cy="201168"/>
           </a:xfrm>
           <a:prstGeom prst="rect">
             <a:avLst/>
@@ -7099,6 +7630,10 @@
           </a:solidFill>
           <a:ln/>
         </p:spPr>
+        <p:txBody>
+          <a:bodyPr/>
+          <a:p/>
+        </p:txBody>
       </p:sp>
       <p:sp>
         <p:nvSpPr>
@@ -7158,6 +7693,10 @@
           </a:solidFill>
           <a:ln/>
         </p:spPr>
+        <p:txBody>
+          <a:bodyPr/>
+          <a:p/>
+        </p:txBody>
       </p:sp>
       <p:sp>
         <p:nvSpPr>
@@ -7246,7 +7785,7 @@
         <p:spPr>
           <a:xfrm>
             <a:off x="457200" y="3108960"/>
-            <a:ext cx="5029200" cy="201168"/>
+            <a:ext cx="3886200" cy="201168"/>
           </a:xfrm>
           <a:prstGeom prst="rect">
             <a:avLst/>
@@ -7284,8 +7823,8 @@
         </p:nvSpPr>
         <p:spPr>
           <a:xfrm>
-            <a:off x="5349240" y="3108960"/>
-            <a:ext cx="1920240" cy="201168"/>
+            <a:off x="4434840" y="3108960"/>
+            <a:ext cx="1600200" cy="201168"/>
           </a:xfrm>
           <a:prstGeom prst="rect">
             <a:avLst/>
@@ -7336,6 +7875,10 @@
           </a:solidFill>
           <a:ln/>
         </p:spPr>
+        <p:txBody>
+          <a:bodyPr/>
+          <a:p/>
+        </p:txBody>
       </p:sp>
       <p:sp>
         <p:nvSpPr>
@@ -7395,6 +7938,10 @@
           </a:solidFill>
           <a:ln/>
         </p:spPr>
+        <p:txBody>
+          <a:bodyPr/>
+          <a:p/>
+        </p:txBody>
       </p:sp>
       <p:sp>
         <p:nvSpPr>
@@ -7405,7 +7952,7 @@
         <p:spPr>
           <a:xfrm>
             <a:off x="457200" y="3310128"/>
-            <a:ext cx="5029200" cy="201168"/>
+            <a:ext cx="3886200" cy="201168"/>
           </a:xfrm>
           <a:prstGeom prst="rect">
             <a:avLst/>
@@ -7443,8 +7990,8 @@
         </p:nvSpPr>
         <p:spPr>
           <a:xfrm>
-            <a:off x="5349240" y="3310128"/>
-            <a:ext cx="1920240" cy="201168"/>
+            <a:off x="4434840" y="3310128"/>
+            <a:ext cx="1600200" cy="201168"/>
           </a:xfrm>
           <a:prstGeom prst="rect">
             <a:avLst/>
@@ -7495,6 +8042,10 @@
           </a:solidFill>
           <a:ln/>
         </p:spPr>
+        <p:txBody>
+          <a:bodyPr/>
+          <a:p/>
+        </p:txBody>
       </p:sp>
       <p:sp>
         <p:nvSpPr>
@@ -7544,7 +8095,7 @@
         <p:spPr>
           <a:xfrm>
             <a:off x="457200" y="3511296"/>
-            <a:ext cx="5029200" cy="201168"/>
+            <a:ext cx="3886200" cy="201168"/>
           </a:xfrm>
           <a:prstGeom prst="rect">
             <a:avLst/>
@@ -7582,8 +8133,8 @@
         </p:nvSpPr>
         <p:spPr>
           <a:xfrm>
-            <a:off x="5349240" y="3511296"/>
-            <a:ext cx="1920240" cy="201168"/>
+            <a:off x="4434840" y="3511296"/>
+            <a:ext cx="1600200" cy="201168"/>
           </a:xfrm>
           <a:prstGeom prst="rect">
             <a:avLst/>
@@ -7634,6 +8185,10 @@
           </a:solidFill>
           <a:ln/>
         </p:spPr>
+        <p:txBody>
+          <a:bodyPr/>
+          <a:p/>
+        </p:txBody>
       </p:sp>
       <p:sp>
         <p:nvSpPr>
@@ -7693,6 +8248,10 @@
           </a:solidFill>
           <a:ln/>
         </p:spPr>
+        <p:txBody>
+          <a:bodyPr/>
+          <a:p/>
+        </p:txBody>
       </p:sp>
       <p:sp>
         <p:nvSpPr>
@@ -7703,7 +8262,7 @@
         <p:spPr>
           <a:xfrm>
             <a:off x="457200" y="3712464"/>
-            <a:ext cx="5029200" cy="201168"/>
+            <a:ext cx="3886200" cy="201168"/>
           </a:xfrm>
           <a:prstGeom prst="rect">
             <a:avLst/>
@@ -7741,8 +8300,8 @@
         </p:nvSpPr>
         <p:spPr>
           <a:xfrm>
-            <a:off x="5349240" y="3712464"/>
-            <a:ext cx="1920240" cy="201168"/>
+            <a:off x="4434840" y="3712464"/>
+            <a:ext cx="1600200" cy="201168"/>
           </a:xfrm>
           <a:prstGeom prst="rect">
             <a:avLst/>
@@ -7793,6 +8352,10 @@
           </a:solidFill>
           <a:ln/>
         </p:spPr>
+        <p:txBody>
+          <a:bodyPr/>
+          <a:p/>
+        </p:txBody>
       </p:sp>
       <p:sp>
         <p:nvSpPr>
@@ -7842,7 +8405,7 @@
         <p:spPr>
           <a:xfrm>
             <a:off x="457200" y="3913632"/>
-            <a:ext cx="5029200" cy="201168"/>
+            <a:ext cx="3886200" cy="201168"/>
           </a:xfrm>
           <a:prstGeom prst="rect">
             <a:avLst/>
@@ -7880,8 +8443,8 @@
         </p:nvSpPr>
         <p:spPr>
           <a:xfrm>
-            <a:off x="5349240" y="3913632"/>
-            <a:ext cx="1920240" cy="201168"/>
+            <a:off x="4434840" y="3913632"/>
+            <a:ext cx="1600200" cy="201168"/>
           </a:xfrm>
           <a:prstGeom prst="rect">
             <a:avLst/>
@@ -7932,6 +8495,10 @@
           </a:solidFill>
           <a:ln/>
         </p:spPr>
+        <p:txBody>
+          <a:bodyPr/>
+          <a:p/>
+        </p:txBody>
       </p:sp>
       <p:sp>
         <p:nvSpPr>
@@ -7991,6 +8558,10 @@
           </a:solidFill>
           <a:ln/>
         </p:spPr>
+        <p:txBody>
+          <a:bodyPr/>
+          <a:p/>
+        </p:txBody>
       </p:sp>
       <p:sp>
         <p:nvSpPr>
@@ -8001,7 +8572,7 @@
         <p:spPr>
           <a:xfrm>
             <a:off x="457200" y="4114800"/>
-            <a:ext cx="5029200" cy="201168"/>
+            <a:ext cx="3886200" cy="201168"/>
           </a:xfrm>
           <a:prstGeom prst="rect">
             <a:avLst/>
@@ -8039,8 +8610,8 @@
         </p:nvSpPr>
         <p:spPr>
           <a:xfrm>
-            <a:off x="5349240" y="4114800"/>
-            <a:ext cx="1920240" cy="201168"/>
+            <a:off x="4434840" y="4114800"/>
+            <a:ext cx="1600200" cy="201168"/>
           </a:xfrm>
           <a:prstGeom prst="rect">
             <a:avLst/>
@@ -8091,6 +8662,10 @@
           </a:solidFill>
           <a:ln/>
         </p:spPr>
+        <p:txBody>
+          <a:bodyPr/>
+          <a:p/>
+        </p:txBody>
       </p:sp>
       <p:sp>
         <p:nvSpPr>
@@ -8140,7 +8715,7 @@
         <p:spPr>
           <a:xfrm>
             <a:off x="457200" y="4315968"/>
-            <a:ext cx="5029200" cy="201168"/>
+            <a:ext cx="3886200" cy="201168"/>
           </a:xfrm>
           <a:prstGeom prst="rect">
             <a:avLst/>
@@ -8178,8 +8753,8 @@
         </p:nvSpPr>
         <p:spPr>
           <a:xfrm>
-            <a:off x="5349240" y="4315968"/>
-            <a:ext cx="1920240" cy="201168"/>
+            <a:off x="4434840" y="4315968"/>
+            <a:ext cx="1600200" cy="201168"/>
           </a:xfrm>
           <a:prstGeom prst="rect">
             <a:avLst/>
@@ -8230,6 +8805,10 @@
           </a:solidFill>
           <a:ln/>
         </p:spPr>
+        <p:txBody>
+          <a:bodyPr/>
+          <a:p/>
+        </p:txBody>
       </p:sp>
       <p:sp>
         <p:nvSpPr>
@@ -8345,6 +8924,591 @@
               <a:t>CONFIDENTIAL · Page 3</a:t>
             </a:r>
             <a:endParaRPr lang="en-US" sz="700" dirty="0"/>
+          </a:p>
+        </p:txBody>
+      </p:sp>
+      <p:sp>
+        <p:nvSpPr>
+          <p:cNvPr id="11" name="Text 8"/>
+          <p:cNvSpPr/>
+          <p:nvPr/>
+        </p:nvSpPr>
+        <p:spPr>
+          <a:xfrm>
+            <a:off x="6172200" y="1078992"/>
+            <a:ext cx="960120" cy="201168"/>
+          </a:xfrm>
+          <a:prstGeom prst="rect">
+            <a:avLst/>
+          </a:prstGeom>
+          <a:noFill/>
+          <a:ln/>
+        </p:spPr>
+        <p:txBody>
+          <a:bodyPr wrap="square" lIns="0" tIns="0" rIns="0" bIns="0" rtlCol="0" anchor="ctr"/>
+          <a:lstStyle/>
+          <a:p>
+            <a:pPr algn="ctr" indent="0" marL="0">
+              <a:buNone/>
+            </a:pPr>
+            <a:r>
+              <a:rPr lang="en-US" sz="800" b="1" spc="100" kern="0" dirty="0">
+                <a:solidFill>
+                  <a:srgbClr val="FFFFFF"/>
+                </a:solidFill>
+                <a:latin typeface="Plus Jakarta Sans" pitchFamily="34" charset="0"/>
+                <a:ea typeface="Plus Jakarta Sans" pitchFamily="34" charset="-122"/>
+                <a:cs typeface="Plus Jakarta Sans" pitchFamily="34" charset="-120"/>
+              </a:rPr>
+              <a:t>NO SHOW</a:t>
+            </a:r>
+            <a:endParaRPr lang="en-US" sz="800" dirty="0"/>
+          </a:p>
+        </p:txBody>
+      </p:sp>
+      <p:sp>
+        <p:nvSpPr>
+          <p:cNvPr id="17" name="Text 14"/>
+          <p:cNvSpPr/>
+          <p:nvPr/>
+        </p:nvSpPr>
+        <p:spPr>
+          <a:xfrm>
+            <a:off x="6172200" y="1499616"/>
+            <a:ext cx="960120" cy="201168"/>
+          </a:xfrm>
+          <a:prstGeom prst="rect">
+            <a:avLst/>
+          </a:prstGeom>
+          <a:noFill/>
+          <a:ln/>
+        </p:spPr>
+        <p:txBody>
+          <a:bodyPr wrap="square" lIns="0" tIns="0" rIns="0" bIns="0" rtlCol="0" anchor="ctr"/>
+          <a:lstStyle/>
+          <a:p>
+            <a:pPr algn="ctr" indent="0" marL="0">
+              <a:buNone/>
+            </a:pPr>
+            <a:r>
+              <a:rPr lang="en-US" sz="1000" dirty="0">
+                <a:solidFill>
+                  <a:srgbClr val="5A5470"/>
+                </a:solidFill>
+                <a:latin typeface="Times New Roman" pitchFamily="34" charset="0"/>
+                <a:ea typeface="Times New Roman" pitchFamily="34" charset="-122"/>
+                <a:cs typeface="Times New Roman" pitchFamily="34" charset="-120"/>
+              </a:rPr>
+              <a:t>—</a:t>
+            </a:r>
+            <a:endParaRPr lang="en-US" sz="1000" dirty="0"/>
+          </a:p>
+        </p:txBody>
+      </p:sp>
+      <p:sp>
+        <p:nvSpPr>
+          <p:cNvPr id="22" name="Text 19"/>
+          <p:cNvSpPr/>
+          <p:nvPr/>
+        </p:nvSpPr>
+        <p:spPr>
+          <a:xfrm>
+            <a:off x="6172200" y="1700784"/>
+            <a:ext cx="960120" cy="201168"/>
+          </a:xfrm>
+          <a:prstGeom prst="rect">
+            <a:avLst/>
+          </a:prstGeom>
+          <a:noFill/>
+          <a:ln/>
+        </p:spPr>
+        <p:txBody>
+          <a:bodyPr wrap="square" lIns="0" tIns="0" rIns="0" bIns="0" rtlCol="0" anchor="ctr"/>
+          <a:lstStyle/>
+          <a:p>
+            <a:pPr algn="ctr" indent="0" marL="0">
+              <a:buNone/>
+            </a:pPr>
+            <a:r>
+              <a:rPr lang="en-US" sz="1000" dirty="0">
+                <a:solidFill>
+                  <a:srgbClr val="5A5470"/>
+                </a:solidFill>
+                <a:latin typeface="Times New Roman" pitchFamily="34" charset="0"/>
+                <a:ea typeface="Times New Roman" pitchFamily="34" charset="-122"/>
+                <a:cs typeface="Times New Roman" pitchFamily="34" charset="-120"/>
+              </a:rPr>
+              <a:t>—</a:t>
+            </a:r>
+            <a:endParaRPr lang="en-US" sz="1000" dirty="0"/>
+          </a:p>
+        </p:txBody>
+      </p:sp>
+      <p:sp>
+        <p:nvSpPr>
+          <p:cNvPr id="26" name="Text 23"/>
+          <p:cNvSpPr/>
+          <p:nvPr/>
+        </p:nvSpPr>
+        <p:spPr>
+          <a:xfrm>
+            <a:off x="6172200" y="1901952"/>
+            <a:ext cx="960120" cy="201168"/>
+          </a:xfrm>
+          <a:prstGeom prst="rect">
+            <a:avLst/>
+          </a:prstGeom>
+          <a:noFill/>
+          <a:ln/>
+        </p:spPr>
+        <p:txBody>
+          <a:bodyPr wrap="square" lIns="0" tIns="0" rIns="0" bIns="0" rtlCol="0" anchor="ctr"/>
+          <a:lstStyle/>
+          <a:p>
+            <a:pPr algn="ctr" indent="0" marL="0">
+              <a:buNone/>
+            </a:pPr>
+            <a:r>
+              <a:rPr lang="en-US" sz="1000" dirty="0">
+                <a:solidFill>
+                  <a:srgbClr val="5A5470"/>
+                </a:solidFill>
+                <a:latin typeface="Times New Roman" pitchFamily="34" charset="0"/>
+                <a:ea typeface="Times New Roman" pitchFamily="34" charset="-122"/>
+                <a:cs typeface="Times New Roman" pitchFamily="34" charset="-120"/>
+              </a:rPr>
+              <a:t>—</a:t>
+            </a:r>
+            <a:endParaRPr lang="en-US" sz="1000" dirty="0"/>
+          </a:p>
+        </p:txBody>
+      </p:sp>
+      <p:sp>
+        <p:nvSpPr>
+          <p:cNvPr id="31" name="Text 28"/>
+          <p:cNvSpPr/>
+          <p:nvPr/>
+        </p:nvSpPr>
+        <p:spPr>
+          <a:xfrm>
+            <a:off x="6172200" y="2103120"/>
+            <a:ext cx="960120" cy="201168"/>
+          </a:xfrm>
+          <a:prstGeom prst="rect">
+            <a:avLst/>
+          </a:prstGeom>
+          <a:noFill/>
+          <a:ln/>
+        </p:spPr>
+        <p:txBody>
+          <a:bodyPr wrap="square" lIns="0" tIns="0" rIns="0" bIns="0" rtlCol="0" anchor="ctr"/>
+          <a:lstStyle/>
+          <a:p>
+            <a:pPr algn="ctr" indent="0" marL="0">
+              <a:buNone/>
+            </a:pPr>
+            <a:r>
+              <a:rPr lang="en-US" sz="1000" dirty="0">
+                <a:solidFill>
+                  <a:srgbClr val="5A5470"/>
+                </a:solidFill>
+                <a:latin typeface="Times New Roman" pitchFamily="34" charset="0"/>
+                <a:ea typeface="Times New Roman" pitchFamily="34" charset="-122"/>
+                <a:cs typeface="Times New Roman" pitchFamily="34" charset="-120"/>
+              </a:rPr>
+              <a:t>—</a:t>
+            </a:r>
+            <a:endParaRPr lang="en-US" sz="1000" dirty="0"/>
+          </a:p>
+        </p:txBody>
+      </p:sp>
+      <p:sp>
+        <p:nvSpPr>
+          <p:cNvPr id="35" name="Text 32"/>
+          <p:cNvSpPr/>
+          <p:nvPr/>
+        </p:nvSpPr>
+        <p:spPr>
+          <a:xfrm>
+            <a:off x="6172200" y="2304288"/>
+            <a:ext cx="960120" cy="201168"/>
+          </a:xfrm>
+          <a:prstGeom prst="rect">
+            <a:avLst/>
+          </a:prstGeom>
+          <a:noFill/>
+          <a:ln/>
+        </p:spPr>
+        <p:txBody>
+          <a:bodyPr wrap="square" lIns="0" tIns="0" rIns="0" bIns="0" rtlCol="0" anchor="ctr"/>
+          <a:lstStyle/>
+          <a:p>
+            <a:pPr algn="ctr" indent="0" marL="0">
+              <a:buNone/>
+            </a:pPr>
+            <a:r>
+              <a:rPr lang="en-US" sz="1000" dirty="0">
+                <a:solidFill>
+                  <a:srgbClr val="5A5470"/>
+                </a:solidFill>
+                <a:latin typeface="Times New Roman" pitchFamily="34" charset="0"/>
+                <a:ea typeface="Times New Roman" pitchFamily="34" charset="-122"/>
+                <a:cs typeface="Times New Roman" pitchFamily="34" charset="-120"/>
+              </a:rPr>
+              <a:t>—</a:t>
+            </a:r>
+            <a:endParaRPr lang="en-US" sz="1000" dirty="0"/>
+          </a:p>
+        </p:txBody>
+      </p:sp>
+      <p:sp>
+        <p:nvSpPr>
+          <p:cNvPr id="40" name="Text 37"/>
+          <p:cNvSpPr/>
+          <p:nvPr/>
+        </p:nvSpPr>
+        <p:spPr>
+          <a:xfrm>
+            <a:off x="6172200" y="2505456"/>
+            <a:ext cx="960120" cy="201168"/>
+          </a:xfrm>
+          <a:prstGeom prst="rect">
+            <a:avLst/>
+          </a:prstGeom>
+          <a:noFill/>
+          <a:ln/>
+        </p:spPr>
+        <p:txBody>
+          <a:bodyPr wrap="square" lIns="0" tIns="0" rIns="0" bIns="0" rtlCol="0" anchor="ctr"/>
+          <a:lstStyle/>
+          <a:p>
+            <a:pPr algn="ctr" indent="0" marL="0">
+              <a:buNone/>
+            </a:pPr>
+            <a:r>
+              <a:rPr lang="en-US" sz="1000" dirty="0">
+                <a:solidFill>
+                  <a:srgbClr val="5A5470"/>
+                </a:solidFill>
+                <a:latin typeface="Times New Roman" pitchFamily="34" charset="0"/>
+                <a:ea typeface="Times New Roman" pitchFamily="34" charset="-122"/>
+                <a:cs typeface="Times New Roman" pitchFamily="34" charset="-120"/>
+              </a:rPr>
+              <a:t>—</a:t>
+            </a:r>
+            <a:endParaRPr lang="en-US" sz="1000" dirty="0"/>
+          </a:p>
+        </p:txBody>
+      </p:sp>
+      <p:sp>
+        <p:nvSpPr>
+          <p:cNvPr id="44" name="Text 41"/>
+          <p:cNvSpPr/>
+          <p:nvPr/>
+        </p:nvSpPr>
+        <p:spPr>
+          <a:xfrm>
+            <a:off x="6172200" y="2706624"/>
+            <a:ext cx="960120" cy="201168"/>
+          </a:xfrm>
+          <a:prstGeom prst="rect">
+            <a:avLst/>
+          </a:prstGeom>
+          <a:noFill/>
+          <a:ln/>
+        </p:spPr>
+        <p:txBody>
+          <a:bodyPr wrap="square" lIns="0" tIns="0" rIns="0" bIns="0" rtlCol="0" anchor="ctr"/>
+          <a:lstStyle/>
+          <a:p>
+            <a:pPr algn="ctr" indent="0" marL="0">
+              <a:buNone/>
+            </a:pPr>
+            <a:r>
+              <a:rPr lang="en-US" sz="1000" dirty="0">
+                <a:solidFill>
+                  <a:srgbClr val="5A5470"/>
+                </a:solidFill>
+                <a:latin typeface="Times New Roman" pitchFamily="34" charset="0"/>
+                <a:ea typeface="Times New Roman" pitchFamily="34" charset="-122"/>
+                <a:cs typeface="Times New Roman" pitchFamily="34" charset="-120"/>
+              </a:rPr>
+              <a:t>—</a:t>
+            </a:r>
+            <a:endParaRPr lang="en-US" sz="1000" dirty="0"/>
+          </a:p>
+        </p:txBody>
+      </p:sp>
+      <p:sp>
+        <p:nvSpPr>
+          <p:cNvPr id="51" name="Text 48"/>
+          <p:cNvSpPr/>
+          <p:nvPr/>
+        </p:nvSpPr>
+        <p:spPr>
+          <a:xfrm>
+            <a:off x="6172200" y="3108960"/>
+            <a:ext cx="960120" cy="201168"/>
+          </a:xfrm>
+          <a:prstGeom prst="rect">
+            <a:avLst/>
+          </a:prstGeom>
+          <a:noFill/>
+          <a:ln/>
+        </p:spPr>
+        <p:txBody>
+          <a:bodyPr wrap="square" lIns="0" tIns="0" rIns="0" bIns="0" rtlCol="0" anchor="ctr"/>
+          <a:lstStyle/>
+          <a:p>
+            <a:pPr algn="ctr" indent="0" marL="0">
+              <a:buNone/>
+            </a:pPr>
+            <a:r>
+              <a:rPr lang="en-US" sz="1000" dirty="0">
+                <a:solidFill>
+                  <a:srgbClr val="5A5470"/>
+                </a:solidFill>
+                <a:latin typeface="Times New Roman" pitchFamily="34" charset="0"/>
+                <a:ea typeface="Times New Roman" pitchFamily="34" charset="-122"/>
+                <a:cs typeface="Times New Roman" pitchFamily="34" charset="-120"/>
+              </a:rPr>
+              <a:t>—</a:t>
+            </a:r>
+            <a:endParaRPr lang="en-US" sz="1000" dirty="0"/>
+          </a:p>
+        </p:txBody>
+      </p:sp>
+      <p:sp>
+        <p:nvSpPr>
+          <p:cNvPr id="56" name="Text 53"/>
+          <p:cNvSpPr/>
+          <p:nvPr/>
+        </p:nvSpPr>
+        <p:spPr>
+          <a:xfrm>
+            <a:off x="6172200" y="3310128"/>
+            <a:ext cx="960120" cy="201168"/>
+          </a:xfrm>
+          <a:prstGeom prst="rect">
+            <a:avLst/>
+          </a:prstGeom>
+          <a:noFill/>
+          <a:ln/>
+        </p:spPr>
+        <p:txBody>
+          <a:bodyPr wrap="square" lIns="0" tIns="0" rIns="0" bIns="0" rtlCol="0" anchor="ctr"/>
+          <a:lstStyle/>
+          <a:p>
+            <a:pPr algn="ctr" indent="0" marL="0">
+              <a:buNone/>
+            </a:pPr>
+            <a:r>
+              <a:rPr lang="en-US" sz="1000" dirty="0">
+                <a:solidFill>
+                  <a:srgbClr val="5A5470"/>
+                </a:solidFill>
+                <a:latin typeface="Times New Roman" pitchFamily="34" charset="0"/>
+                <a:ea typeface="Times New Roman" pitchFamily="34" charset="-122"/>
+                <a:cs typeface="Times New Roman" pitchFamily="34" charset="-120"/>
+              </a:rPr>
+              <a:t>—</a:t>
+            </a:r>
+            <a:endParaRPr lang="en-US" sz="1000" dirty="0"/>
+          </a:p>
+        </p:txBody>
+      </p:sp>
+      <p:sp>
+        <p:nvSpPr>
+          <p:cNvPr id="60" name="Text 57"/>
+          <p:cNvSpPr/>
+          <p:nvPr/>
+        </p:nvSpPr>
+        <p:spPr>
+          <a:xfrm>
+            <a:off x="6172200" y="3511296"/>
+            <a:ext cx="960120" cy="201168"/>
+          </a:xfrm>
+          <a:prstGeom prst="rect">
+            <a:avLst/>
+          </a:prstGeom>
+          <a:noFill/>
+          <a:ln/>
+        </p:spPr>
+        <p:txBody>
+          <a:bodyPr wrap="square" lIns="0" tIns="0" rIns="0" bIns="0" rtlCol="0" anchor="ctr"/>
+          <a:lstStyle/>
+          <a:p>
+            <a:pPr algn="ctr" indent="0" marL="0">
+              <a:buNone/>
+            </a:pPr>
+            <a:r>
+              <a:rPr lang="en-US" sz="1000" dirty="0">
+                <a:solidFill>
+                  <a:srgbClr val="5A5470"/>
+                </a:solidFill>
+                <a:latin typeface="Times New Roman" pitchFamily="34" charset="0"/>
+                <a:ea typeface="Times New Roman" pitchFamily="34" charset="-122"/>
+                <a:cs typeface="Times New Roman" pitchFamily="34" charset="-120"/>
+              </a:rPr>
+              <a:t>—</a:t>
+            </a:r>
+            <a:endParaRPr lang="en-US" sz="1000" dirty="0"/>
+          </a:p>
+        </p:txBody>
+      </p:sp>
+      <p:sp>
+        <p:nvSpPr>
+          <p:cNvPr id="65" name="Text 62"/>
+          <p:cNvSpPr/>
+          <p:nvPr/>
+        </p:nvSpPr>
+        <p:spPr>
+          <a:xfrm>
+            <a:off x="6172200" y="3712464"/>
+            <a:ext cx="960120" cy="201168"/>
+          </a:xfrm>
+          <a:prstGeom prst="rect">
+            <a:avLst/>
+          </a:prstGeom>
+          <a:noFill/>
+          <a:ln/>
+        </p:spPr>
+        <p:txBody>
+          <a:bodyPr wrap="square" lIns="0" tIns="0" rIns="0" bIns="0" rtlCol="0" anchor="ctr"/>
+          <a:lstStyle/>
+          <a:p>
+            <a:pPr algn="ctr" indent="0" marL="0">
+              <a:buNone/>
+            </a:pPr>
+            <a:r>
+              <a:rPr lang="en-US" sz="1000" dirty="0">
+                <a:solidFill>
+                  <a:srgbClr val="5A5470"/>
+                </a:solidFill>
+                <a:latin typeface="Times New Roman" pitchFamily="34" charset="0"/>
+                <a:ea typeface="Times New Roman" pitchFamily="34" charset="-122"/>
+                <a:cs typeface="Times New Roman" pitchFamily="34" charset="-120"/>
+              </a:rPr>
+              <a:t>—</a:t>
+            </a:r>
+            <a:endParaRPr lang="en-US" sz="1000" dirty="0"/>
+          </a:p>
+        </p:txBody>
+      </p:sp>
+      <p:sp>
+        <p:nvSpPr>
+          <p:cNvPr id="69" name="Text 66"/>
+          <p:cNvSpPr/>
+          <p:nvPr/>
+        </p:nvSpPr>
+        <p:spPr>
+          <a:xfrm>
+            <a:off x="6172200" y="3913632"/>
+            <a:ext cx="960120" cy="201168"/>
+          </a:xfrm>
+          <a:prstGeom prst="rect">
+            <a:avLst/>
+          </a:prstGeom>
+          <a:noFill/>
+          <a:ln/>
+        </p:spPr>
+        <p:txBody>
+          <a:bodyPr wrap="square" lIns="0" tIns="0" rIns="0" bIns="0" rtlCol="0" anchor="ctr"/>
+          <a:lstStyle/>
+          <a:p>
+            <a:pPr algn="ctr" indent="0" marL="0">
+              <a:buNone/>
+            </a:pPr>
+            <a:r>
+              <a:rPr lang="en-US" sz="1000" dirty="0">
+                <a:solidFill>
+                  <a:srgbClr val="5A5470"/>
+                </a:solidFill>
+                <a:latin typeface="Times New Roman" pitchFamily="34" charset="0"/>
+                <a:ea typeface="Times New Roman" pitchFamily="34" charset="-122"/>
+                <a:cs typeface="Times New Roman" pitchFamily="34" charset="-120"/>
+              </a:rPr>
+              <a:t>—</a:t>
+            </a:r>
+            <a:endParaRPr lang="en-US" sz="1000" dirty="0"/>
+          </a:p>
+        </p:txBody>
+      </p:sp>
+      <p:sp>
+        <p:nvSpPr>
+          <p:cNvPr id="74" name="Text 71"/>
+          <p:cNvSpPr/>
+          <p:nvPr/>
+        </p:nvSpPr>
+        <p:spPr>
+          <a:xfrm>
+            <a:off x="6172200" y="4114800"/>
+            <a:ext cx="960120" cy="201168"/>
+          </a:xfrm>
+          <a:prstGeom prst="rect">
+            <a:avLst/>
+          </a:prstGeom>
+          <a:noFill/>
+          <a:ln/>
+        </p:spPr>
+        <p:txBody>
+          <a:bodyPr wrap="square" lIns="0" tIns="0" rIns="0" bIns="0" rtlCol="0" anchor="ctr"/>
+          <a:lstStyle/>
+          <a:p>
+            <a:pPr algn="ctr" indent="0" marL="0">
+              <a:buNone/>
+            </a:pPr>
+            <a:r>
+              <a:rPr lang="en-US" sz="1000" dirty="0">
+                <a:solidFill>
+                  <a:srgbClr val="5A5470"/>
+                </a:solidFill>
+                <a:latin typeface="Times New Roman" pitchFamily="34" charset="0"/>
+                <a:ea typeface="Times New Roman" pitchFamily="34" charset="-122"/>
+                <a:cs typeface="Times New Roman" pitchFamily="34" charset="-120"/>
+              </a:rPr>
+              <a:t>—</a:t>
+            </a:r>
+            <a:endParaRPr lang="en-US" sz="1000" dirty="0"/>
+          </a:p>
+        </p:txBody>
+      </p:sp>
+      <p:sp>
+        <p:nvSpPr>
+          <p:cNvPr id="78" name="Text 75"/>
+          <p:cNvSpPr/>
+          <p:nvPr/>
+        </p:nvSpPr>
+        <p:spPr>
+          <a:xfrm>
+            <a:off x="6172200" y="4315968"/>
+            <a:ext cx="960120" cy="201168"/>
+          </a:xfrm>
+          <a:prstGeom prst="rect">
+            <a:avLst/>
+          </a:prstGeom>
+          <a:noFill/>
+          <a:ln/>
+        </p:spPr>
+        <p:txBody>
+          <a:bodyPr wrap="square" lIns="0" tIns="0" rIns="0" bIns="0" rtlCol="0" anchor="ctr"/>
+          <a:lstStyle/>
+          <a:p>
+            <a:pPr algn="ctr" indent="0" marL="0">
+              <a:buNone/>
+            </a:pPr>
+            <a:r>
+              <a:rPr lang="en-US" sz="1000" dirty="0">
+                <a:solidFill>
+                  <a:srgbClr val="5A5470"/>
+                </a:solidFill>
+                <a:latin typeface="Times New Roman" pitchFamily="34" charset="0"/>
+                <a:ea typeface="Times New Roman" pitchFamily="34" charset="-122"/>
+                <a:cs typeface="Times New Roman" pitchFamily="34" charset="-120"/>
+              </a:rPr>
+              <a:t>—</a:t>
+            </a:r>
+            <a:endParaRPr lang="en-US" sz="1000" dirty="0"/>
           </a:p>
         </p:txBody>
       </p:sp>

--- a/template/Cluster2_Daily_Report_BLANK_Template.pptx
+++ b/template/Cluster2_Daily_Report_BLANK_Template.pptx
@@ -1297,10 +1297,6 @@
           </a:solidFill>
           <a:ln/>
         </p:spPr>
-        <p:txBody>
-          <a:bodyPr/>
-          <a:p/>
-        </p:txBody>
       </p:sp>
       <p:sp>
         <p:nvSpPr>
@@ -1440,10 +1436,6 @@
           </a:solidFill>
           <a:ln/>
         </p:spPr>
-        <p:txBody>
-          <a:bodyPr/>
-          <a:p/>
-        </p:txBody>
       </p:sp>
       <p:sp>
         <p:nvSpPr>
@@ -1583,10 +1575,6 @@
           </a:solidFill>
           <a:ln/>
         </p:spPr>
-        <p:txBody>
-          <a:bodyPr/>
-          <a:p/>
-        </p:txBody>
       </p:sp>
       <p:sp>
         <p:nvSpPr>
@@ -1724,10 +1712,6 @@
           </a:solidFill>
           <a:ln/>
         </p:spPr>
-        <p:txBody>
-          <a:bodyPr/>
-          <a:p/>
-        </p:txBody>
       </p:sp>
       <p:sp>
         <p:nvSpPr>
@@ -1787,10 +1771,6 @@
           </a:solidFill>
           <a:ln/>
         </p:spPr>
-        <p:txBody>
-          <a:bodyPr/>
-          <a:p/>
-        </p:txBody>
       </p:sp>
       <p:sp>
         <p:nvSpPr>
@@ -2045,10 +2025,6 @@
           </a:solidFill>
           <a:ln/>
         </p:spPr>
-        <p:txBody>
-          <a:bodyPr/>
-          <a:p/>
-        </p:txBody>
       </p:sp>
       <p:sp>
         <p:nvSpPr>
@@ -2266,10 +2242,6 @@
           </a:solidFill>
           <a:ln/>
         </p:spPr>
-        <p:txBody>
-          <a:bodyPr/>
-          <a:p/>
-        </p:txBody>
       </p:sp>
       <p:sp>
         <p:nvSpPr>
@@ -2526,10 +2498,6 @@
           </a:solidFill>
           <a:ln/>
         </p:spPr>
-        <p:txBody>
-          <a:bodyPr/>
-          <a:p/>
-        </p:txBody>
       </p:sp>
       <p:sp>
         <p:nvSpPr>
@@ -2589,10 +2557,6 @@
           </a:solidFill>
           <a:ln/>
         </p:spPr>
-        <p:txBody>
-          <a:bodyPr/>
-          <a:p/>
-        </p:txBody>
       </p:sp>
       <p:sp>
         <p:nvSpPr>
@@ -2810,10 +2774,6 @@
           </a:solidFill>
           <a:ln/>
         </p:spPr>
-        <p:txBody>
-          <a:bodyPr/>
-          <a:p/>
-        </p:txBody>
       </p:sp>
       <p:sp>
         <p:nvSpPr>
@@ -3070,10 +3030,6 @@
           </a:solidFill>
           <a:ln/>
         </p:spPr>
-        <p:txBody>
-          <a:bodyPr/>
-          <a:p/>
-        </p:txBody>
       </p:sp>
       <p:sp>
         <p:nvSpPr>
@@ -3135,10 +3091,6 @@
           </a:solidFill>
           <a:ln/>
         </p:spPr>
-        <p:txBody>
-          <a:bodyPr/>
-          <a:p/>
-        </p:txBody>
       </p:sp>
       <p:sp>
         <p:nvSpPr>
@@ -3522,10 +3474,6 @@
           </a:solidFill>
           <a:ln/>
         </p:spPr>
-        <p:txBody>
-          <a:bodyPr/>
-          <a:p/>
-        </p:txBody>
       </p:sp>
       <p:sp>
         <p:nvSpPr>
@@ -3814,10 +3762,6 @@
             <a:prstDash val="solid"/>
           </a:ln>
         </p:spPr>
-        <p:txBody>
-          <a:bodyPr/>
-          <a:p/>
-        </p:txBody>
       </p:sp>
       <p:sp>
         <p:nvSpPr>
@@ -3841,10 +3785,6 @@
             <a:prstDash val="solid"/>
           </a:ln>
         </p:spPr>
-        <p:txBody>
-          <a:bodyPr/>
-          <a:p/>
-        </p:txBody>
       </p:sp>
       <p:sp>
         <p:nvSpPr>
@@ -3867,10 +3807,6 @@
           </a:solidFill>
           <a:ln/>
         </p:spPr>
-        <p:txBody>
-          <a:bodyPr/>
-          <a:p/>
-        </p:txBody>
       </p:sp>
       <p:sp>
         <p:nvSpPr>
@@ -3958,10 +3894,6 @@
           </a:solidFill>
           <a:ln/>
         </p:spPr>
-        <p:txBody>
-          <a:bodyPr/>
-          <a:p/>
-        </p:txBody>
       </p:sp>
       <p:sp>
         <p:nvSpPr>
@@ -4021,10 +3953,6 @@
           </a:solidFill>
           <a:ln/>
         </p:spPr>
-        <p:txBody>
-          <a:bodyPr/>
-          <a:p/>
-        </p:txBody>
       </p:sp>
       <p:sp>
         <p:nvSpPr>
@@ -4084,10 +4012,6 @@
           </a:solidFill>
           <a:ln/>
         </p:spPr>
-        <p:txBody>
-          <a:bodyPr/>
-          <a:p/>
-        </p:txBody>
       </p:sp>
       <p:sp>
         <p:nvSpPr>
@@ -4147,10 +4071,6 @@
           </a:solidFill>
           <a:ln/>
         </p:spPr>
-        <p:txBody>
-          <a:bodyPr/>
-          <a:p/>
-        </p:txBody>
       </p:sp>
       <p:sp>
         <p:nvSpPr>
@@ -4161,7 +4081,7 @@
         <p:spPr>
           <a:xfrm>
             <a:off x="457200" y="2450592"/>
-            <a:ext cx="3886200" cy="201168"/>
+            <a:ext cx="5029200" cy="201168"/>
           </a:xfrm>
           <a:prstGeom prst="rect">
             <a:avLst/>
@@ -4199,8 +4119,8 @@
         </p:nvSpPr>
         <p:spPr>
           <a:xfrm>
-            <a:off x="4434840" y="2450592"/>
-            <a:ext cx="1600200" cy="201168"/>
+            <a:off x="5349240" y="2450592"/>
+            <a:ext cx="1920240" cy="201168"/>
           </a:xfrm>
           <a:prstGeom prst="rect">
             <a:avLst/>
@@ -4288,10 +4208,6 @@
           </a:solidFill>
           <a:ln/>
         </p:spPr>
-        <p:txBody>
-          <a:bodyPr/>
-          <a:p/>
-        </p:txBody>
       </p:sp>
       <p:sp>
         <p:nvSpPr>
@@ -4380,7 +4296,7 @@
         <p:spPr>
           <a:xfrm>
             <a:off x="457200" y="2871216"/>
-            <a:ext cx="3886200" cy="201168"/>
+            <a:ext cx="5029200" cy="201168"/>
           </a:xfrm>
           <a:prstGeom prst="rect">
             <a:avLst/>
@@ -4418,8 +4334,8 @@
         </p:nvSpPr>
         <p:spPr>
           <a:xfrm>
-            <a:off x="4434840" y="2871216"/>
-            <a:ext cx="1600200" cy="201168"/>
+            <a:off x="5349240" y="2871216"/>
+            <a:ext cx="1920240" cy="201168"/>
           </a:xfrm>
           <a:prstGeom prst="rect">
             <a:avLst/>
@@ -4470,10 +4386,6 @@
           </a:solidFill>
           <a:ln/>
         </p:spPr>
-        <p:txBody>
-          <a:bodyPr/>
-          <a:p/>
-        </p:txBody>
       </p:sp>
       <p:sp>
         <p:nvSpPr>
@@ -4533,10 +4445,6 @@
           </a:solidFill>
           <a:ln/>
         </p:spPr>
-        <p:txBody>
-          <a:bodyPr/>
-          <a:p/>
-        </p:txBody>
       </p:sp>
       <p:sp>
         <p:nvSpPr>
@@ -4547,7 +4455,7 @@
         <p:spPr>
           <a:xfrm>
             <a:off x="457200" y="3072384"/>
-            <a:ext cx="3886200" cy="201168"/>
+            <a:ext cx="5029200" cy="201168"/>
           </a:xfrm>
           <a:prstGeom prst="rect">
             <a:avLst/>
@@ -4585,8 +4493,8 @@
         </p:nvSpPr>
         <p:spPr>
           <a:xfrm>
-            <a:off x="4434840" y="3072384"/>
-            <a:ext cx="1600200" cy="201168"/>
+            <a:off x="5349240" y="3072384"/>
+            <a:ext cx="1920240" cy="201168"/>
           </a:xfrm>
           <a:prstGeom prst="rect">
             <a:avLst/>
@@ -4637,10 +4545,6 @@
           </a:solidFill>
           <a:ln/>
         </p:spPr>
-        <p:txBody>
-          <a:bodyPr/>
-          <a:p/>
-        </p:txBody>
       </p:sp>
       <p:sp>
         <p:nvSpPr>
@@ -4690,7 +4594,7 @@
         <p:spPr>
           <a:xfrm>
             <a:off x="457200" y="3273552"/>
-            <a:ext cx="3886200" cy="201168"/>
+            <a:ext cx="5029200" cy="201168"/>
           </a:xfrm>
           <a:prstGeom prst="rect">
             <a:avLst/>
@@ -4728,8 +4632,8 @@
         </p:nvSpPr>
         <p:spPr>
           <a:xfrm>
-            <a:off x="4434840" y="3273552"/>
-            <a:ext cx="1600200" cy="201168"/>
+            <a:off x="5349240" y="3273552"/>
+            <a:ext cx="1920240" cy="201168"/>
           </a:xfrm>
           <a:prstGeom prst="rect">
             <a:avLst/>
@@ -4780,10 +4684,6 @@
           </a:solidFill>
           <a:ln/>
         </p:spPr>
-        <p:txBody>
-          <a:bodyPr/>
-          <a:p/>
-        </p:txBody>
       </p:sp>
       <p:sp>
         <p:nvSpPr>
@@ -4843,10 +4743,6 @@
           </a:solidFill>
           <a:ln/>
         </p:spPr>
-        <p:txBody>
-          <a:bodyPr/>
-          <a:p/>
-        </p:txBody>
       </p:sp>
       <p:sp>
         <p:nvSpPr>
@@ -4857,7 +4753,7 @@
         <p:spPr>
           <a:xfrm>
             <a:off x="457200" y="3474720"/>
-            <a:ext cx="3886200" cy="201168"/>
+            <a:ext cx="5029200" cy="201168"/>
           </a:xfrm>
           <a:prstGeom prst="rect">
             <a:avLst/>
@@ -4895,8 +4791,8 @@
         </p:nvSpPr>
         <p:spPr>
           <a:xfrm>
-            <a:off x="4434840" y="3474720"/>
-            <a:ext cx="1600200" cy="201168"/>
+            <a:off x="5349240" y="3474720"/>
+            <a:ext cx="1920240" cy="201168"/>
           </a:xfrm>
           <a:prstGeom prst="rect">
             <a:avLst/>
@@ -4947,10 +4843,6 @@
           </a:solidFill>
           <a:ln/>
         </p:spPr>
-        <p:txBody>
-          <a:bodyPr/>
-          <a:p/>
-        </p:txBody>
       </p:sp>
       <p:sp>
         <p:nvSpPr>
@@ -5010,10 +4902,6 @@
           </a:solidFill>
           <a:ln/>
         </p:spPr>
-        <p:txBody>
-          <a:bodyPr/>
-          <a:p/>
-        </p:txBody>
       </p:sp>
       <p:sp>
         <p:nvSpPr>
@@ -5102,7 +4990,7 @@
         <p:spPr>
           <a:xfrm>
             <a:off x="457200" y="3877056"/>
-            <a:ext cx="3886200" cy="201168"/>
+            <a:ext cx="5029200" cy="201168"/>
           </a:xfrm>
           <a:prstGeom prst="rect">
             <a:avLst/>
@@ -5140,8 +5028,8 @@
         </p:nvSpPr>
         <p:spPr>
           <a:xfrm>
-            <a:off x="4434840" y="3877056"/>
-            <a:ext cx="1600200" cy="201168"/>
+            <a:off x="5349240" y="3877056"/>
+            <a:ext cx="1920240" cy="201168"/>
           </a:xfrm>
           <a:prstGeom prst="rect">
             <a:avLst/>
@@ -5192,10 +5080,6 @@
           </a:solidFill>
           <a:ln/>
         </p:spPr>
-        <p:txBody>
-          <a:bodyPr/>
-          <a:p/>
-        </p:txBody>
       </p:sp>
       <p:sp>
         <p:nvSpPr>
@@ -5255,10 +5139,6 @@
           </a:solidFill>
           <a:ln/>
         </p:spPr>
-        <p:txBody>
-          <a:bodyPr/>
-          <a:p/>
-        </p:txBody>
       </p:sp>
       <p:sp>
         <p:nvSpPr>
@@ -5269,7 +5149,7 @@
         <p:spPr>
           <a:xfrm>
             <a:off x="457200" y="4078224"/>
-            <a:ext cx="3886200" cy="201168"/>
+            <a:ext cx="5029200" cy="201168"/>
           </a:xfrm>
           <a:prstGeom prst="rect">
             <a:avLst/>
@@ -5307,8 +5187,8 @@
         </p:nvSpPr>
         <p:spPr>
           <a:xfrm>
-            <a:off x="4434840" y="4078224"/>
-            <a:ext cx="1600200" cy="201168"/>
+            <a:off x="5349240" y="4078224"/>
+            <a:ext cx="1920240" cy="201168"/>
           </a:xfrm>
           <a:prstGeom prst="rect">
             <a:avLst/>
@@ -5359,10 +5239,6 @@
           </a:solidFill>
           <a:ln/>
         </p:spPr>
-        <p:txBody>
-          <a:bodyPr/>
-          <a:p/>
-        </p:txBody>
       </p:sp>
       <p:sp>
         <p:nvSpPr>
@@ -5412,7 +5288,7 @@
         <p:spPr>
           <a:xfrm>
             <a:off x="457200" y="4279392"/>
-            <a:ext cx="3886200" cy="201168"/>
+            <a:ext cx="5029200" cy="201168"/>
           </a:xfrm>
           <a:prstGeom prst="rect">
             <a:avLst/>
@@ -5450,8 +5326,8 @@
         </p:nvSpPr>
         <p:spPr>
           <a:xfrm>
-            <a:off x="4434840" y="4279392"/>
-            <a:ext cx="1600200" cy="201168"/>
+            <a:off x="5349240" y="4279392"/>
+            <a:ext cx="1920240" cy="201168"/>
           </a:xfrm>
           <a:prstGeom prst="rect">
             <a:avLst/>
@@ -5502,10 +5378,6 @@
           </a:solidFill>
           <a:ln/>
         </p:spPr>
-        <p:txBody>
-          <a:bodyPr/>
-          <a:p/>
-        </p:txBody>
       </p:sp>
       <p:sp>
         <p:nvSpPr>
@@ -5565,10 +5437,6 @@
           </a:solidFill>
           <a:ln/>
         </p:spPr>
-        <p:txBody>
-          <a:bodyPr/>
-          <a:p/>
-        </p:txBody>
       </p:sp>
       <p:sp>
         <p:nvSpPr>
@@ -5579,7 +5447,7 @@
         <p:spPr>
           <a:xfrm>
             <a:off x="457200" y="4480560"/>
-            <a:ext cx="3886200" cy="201168"/>
+            <a:ext cx="5029200" cy="201168"/>
           </a:xfrm>
           <a:prstGeom prst="rect">
             <a:avLst/>
@@ -5617,8 +5485,8 @@
         </p:nvSpPr>
         <p:spPr>
           <a:xfrm>
-            <a:off x="4434840" y="4480560"/>
-            <a:ext cx="1600200" cy="201168"/>
+            <a:off x="5349240" y="4480560"/>
+            <a:ext cx="1920240" cy="201168"/>
           </a:xfrm>
           <a:prstGeom prst="rect">
             <a:avLst/>
@@ -5669,10 +5537,6 @@
           </a:solidFill>
           <a:ln/>
         </p:spPr>
-        <p:txBody>
-          <a:bodyPr/>
-          <a:p/>
-        </p:txBody>
       </p:sp>
       <p:sp>
         <p:nvSpPr>
@@ -5788,357 +5652,6 @@
               <a:t>CONFIDENTIAL · Page 2</a:t>
             </a:r>
             <a:endParaRPr lang="en-US" sz="700" dirty="0"/>
-          </a:p>
-        </p:txBody>
-      </p:sp>
-      <p:sp>
-        <p:nvSpPr>
-          <p:cNvPr id="28" name="Text 25"/>
-          <p:cNvSpPr/>
-          <p:nvPr/>
-        </p:nvSpPr>
-        <p:spPr>
-          <a:xfrm>
-            <a:off x="6172200" y="2450592"/>
-            <a:ext cx="960120" cy="201168"/>
-          </a:xfrm>
-          <a:prstGeom prst="rect">
-            <a:avLst/>
-          </a:prstGeom>
-          <a:noFill/>
-          <a:ln/>
-        </p:spPr>
-        <p:txBody>
-          <a:bodyPr wrap="square" lIns="0" tIns="0" rIns="0" bIns="0" rtlCol="0" anchor="ctr"/>
-          <a:lstStyle/>
-          <a:p>
-            <a:pPr algn="ctr" indent="0" marL="0">
-              <a:buNone/>
-            </a:pPr>
-            <a:r>
-              <a:rPr lang="en-US" sz="800" b="1" spc="100" kern="0" dirty="0">
-                <a:solidFill>
-                  <a:srgbClr val="FFFFFF"/>
-                </a:solidFill>
-                <a:latin typeface="Plus Jakarta Sans" pitchFamily="34" charset="0"/>
-                <a:ea typeface="Plus Jakarta Sans" pitchFamily="34" charset="-122"/>
-                <a:cs typeface="Plus Jakarta Sans" pitchFamily="34" charset="-120"/>
-              </a:rPr>
-              <a:t>NO SHOW</a:t>
-            </a:r>
-            <a:endParaRPr lang="en-US" sz="800" dirty="0"/>
-          </a:p>
-        </p:txBody>
-      </p:sp>
-      <p:sp>
-        <p:nvSpPr>
-          <p:cNvPr id="34" name="Text 31"/>
-          <p:cNvSpPr/>
-          <p:nvPr/>
-        </p:nvSpPr>
-        <p:spPr>
-          <a:xfrm>
-            <a:off x="6172200" y="2871216"/>
-            <a:ext cx="960120" cy="201168"/>
-          </a:xfrm>
-          <a:prstGeom prst="rect">
-            <a:avLst/>
-          </a:prstGeom>
-          <a:noFill/>
-          <a:ln/>
-        </p:spPr>
-        <p:txBody>
-          <a:bodyPr wrap="square" lIns="0" tIns="0" rIns="0" bIns="0" rtlCol="0" anchor="ctr"/>
-          <a:lstStyle/>
-          <a:p>
-            <a:pPr algn="ctr" indent="0" marL="0">
-              <a:buNone/>
-            </a:pPr>
-            <a:r>
-              <a:rPr lang="en-US" sz="1000" dirty="0">
-                <a:solidFill>
-                  <a:srgbClr val="5A5470"/>
-                </a:solidFill>
-                <a:latin typeface="Times New Roman" pitchFamily="34" charset="0"/>
-                <a:ea typeface="Times New Roman" pitchFamily="34" charset="-122"/>
-                <a:cs typeface="Times New Roman" pitchFamily="34" charset="-120"/>
-              </a:rPr>
-              <a:t>—</a:t>
-            </a:r>
-            <a:endParaRPr lang="en-US" sz="1000" dirty="0"/>
-          </a:p>
-        </p:txBody>
-      </p:sp>
-      <p:sp>
-        <p:nvSpPr>
-          <p:cNvPr id="39" name="Text 36"/>
-          <p:cNvSpPr/>
-          <p:nvPr/>
-        </p:nvSpPr>
-        <p:spPr>
-          <a:xfrm>
-            <a:off x="6172200" y="3072384"/>
-            <a:ext cx="960120" cy="201168"/>
-          </a:xfrm>
-          <a:prstGeom prst="rect">
-            <a:avLst/>
-          </a:prstGeom>
-          <a:noFill/>
-          <a:ln/>
-        </p:spPr>
-        <p:txBody>
-          <a:bodyPr wrap="square" lIns="0" tIns="0" rIns="0" bIns="0" rtlCol="0" anchor="ctr"/>
-          <a:lstStyle/>
-          <a:p>
-            <a:pPr algn="ctr" indent="0" marL="0">
-              <a:buNone/>
-            </a:pPr>
-            <a:r>
-              <a:rPr lang="en-US" sz="1000" dirty="0">
-                <a:solidFill>
-                  <a:srgbClr val="5A5470"/>
-                </a:solidFill>
-                <a:latin typeface="Times New Roman" pitchFamily="34" charset="0"/>
-                <a:ea typeface="Times New Roman" pitchFamily="34" charset="-122"/>
-                <a:cs typeface="Times New Roman" pitchFamily="34" charset="-120"/>
-              </a:rPr>
-              <a:t>—</a:t>
-            </a:r>
-            <a:endParaRPr lang="en-US" sz="1000" dirty="0"/>
-          </a:p>
-        </p:txBody>
-      </p:sp>
-      <p:sp>
-        <p:nvSpPr>
-          <p:cNvPr id="43" name="Text 40"/>
-          <p:cNvSpPr/>
-          <p:nvPr/>
-        </p:nvSpPr>
-        <p:spPr>
-          <a:xfrm>
-            <a:off x="6172200" y="3273552"/>
-            <a:ext cx="960120" cy="201168"/>
-          </a:xfrm>
-          <a:prstGeom prst="rect">
-            <a:avLst/>
-          </a:prstGeom>
-          <a:noFill/>
-          <a:ln/>
-        </p:spPr>
-        <p:txBody>
-          <a:bodyPr wrap="square" lIns="0" tIns="0" rIns="0" bIns="0" rtlCol="0" anchor="ctr"/>
-          <a:lstStyle/>
-          <a:p>
-            <a:pPr algn="ctr" indent="0" marL="0">
-              <a:buNone/>
-            </a:pPr>
-            <a:r>
-              <a:rPr lang="en-US" sz="1000" dirty="0">
-                <a:solidFill>
-                  <a:srgbClr val="5A5470"/>
-                </a:solidFill>
-                <a:latin typeface="Times New Roman" pitchFamily="34" charset="0"/>
-                <a:ea typeface="Times New Roman" pitchFamily="34" charset="-122"/>
-                <a:cs typeface="Times New Roman" pitchFamily="34" charset="-120"/>
-              </a:rPr>
-              <a:t>—</a:t>
-            </a:r>
-            <a:endParaRPr lang="en-US" sz="1000" dirty="0"/>
-          </a:p>
-        </p:txBody>
-      </p:sp>
-      <p:sp>
-        <p:nvSpPr>
-          <p:cNvPr id="48" name="Text 45"/>
-          <p:cNvSpPr/>
-          <p:nvPr/>
-        </p:nvSpPr>
-        <p:spPr>
-          <a:xfrm>
-            <a:off x="6172200" y="3474720"/>
-            <a:ext cx="960120" cy="201168"/>
-          </a:xfrm>
-          <a:prstGeom prst="rect">
-            <a:avLst/>
-          </a:prstGeom>
-          <a:noFill/>
-          <a:ln/>
-        </p:spPr>
-        <p:txBody>
-          <a:bodyPr wrap="square" lIns="0" tIns="0" rIns="0" bIns="0" rtlCol="0" anchor="ctr"/>
-          <a:lstStyle/>
-          <a:p>
-            <a:pPr algn="ctr" indent="0" marL="0">
-              <a:buNone/>
-            </a:pPr>
-            <a:r>
-              <a:rPr lang="en-US" sz="1000" dirty="0">
-                <a:solidFill>
-                  <a:srgbClr val="5A5470"/>
-                </a:solidFill>
-                <a:latin typeface="Times New Roman" pitchFamily="34" charset="0"/>
-                <a:ea typeface="Times New Roman" pitchFamily="34" charset="-122"/>
-                <a:cs typeface="Times New Roman" pitchFamily="34" charset="-120"/>
-              </a:rPr>
-              <a:t>—</a:t>
-            </a:r>
-            <a:endParaRPr lang="en-US" sz="1000" dirty="0"/>
-          </a:p>
-        </p:txBody>
-      </p:sp>
-      <p:sp>
-        <p:nvSpPr>
-          <p:cNvPr id="55" name="Text 52"/>
-          <p:cNvSpPr/>
-          <p:nvPr/>
-        </p:nvSpPr>
-        <p:spPr>
-          <a:xfrm>
-            <a:off x="6172200" y="3877056"/>
-            <a:ext cx="960120" cy="201168"/>
-          </a:xfrm>
-          <a:prstGeom prst="rect">
-            <a:avLst/>
-          </a:prstGeom>
-          <a:noFill/>
-          <a:ln/>
-        </p:spPr>
-        <p:txBody>
-          <a:bodyPr wrap="square" lIns="0" tIns="0" rIns="0" bIns="0" rtlCol="0" anchor="ctr"/>
-          <a:lstStyle/>
-          <a:p>
-            <a:pPr algn="ctr" indent="0" marL="0">
-              <a:buNone/>
-            </a:pPr>
-            <a:r>
-              <a:rPr lang="en-US" sz="1000" dirty="0">
-                <a:solidFill>
-                  <a:srgbClr val="5A5470"/>
-                </a:solidFill>
-                <a:latin typeface="Times New Roman" pitchFamily="34" charset="0"/>
-                <a:ea typeface="Times New Roman" pitchFamily="34" charset="-122"/>
-                <a:cs typeface="Times New Roman" pitchFamily="34" charset="-120"/>
-              </a:rPr>
-              <a:t>—</a:t>
-            </a:r>
-            <a:endParaRPr lang="en-US" sz="1000" dirty="0"/>
-          </a:p>
-        </p:txBody>
-      </p:sp>
-      <p:sp>
-        <p:nvSpPr>
-          <p:cNvPr id="60" name="Text 57"/>
-          <p:cNvSpPr/>
-          <p:nvPr/>
-        </p:nvSpPr>
-        <p:spPr>
-          <a:xfrm>
-            <a:off x="6172200" y="4078224"/>
-            <a:ext cx="960120" cy="201168"/>
-          </a:xfrm>
-          <a:prstGeom prst="rect">
-            <a:avLst/>
-          </a:prstGeom>
-          <a:noFill/>
-          <a:ln/>
-        </p:spPr>
-        <p:txBody>
-          <a:bodyPr wrap="square" lIns="0" tIns="0" rIns="0" bIns="0" rtlCol="0" anchor="ctr"/>
-          <a:lstStyle/>
-          <a:p>
-            <a:pPr algn="ctr" indent="0" marL="0">
-              <a:buNone/>
-            </a:pPr>
-            <a:r>
-              <a:rPr lang="en-US" sz="1000" dirty="0">
-                <a:solidFill>
-                  <a:srgbClr val="5A5470"/>
-                </a:solidFill>
-                <a:latin typeface="Times New Roman" pitchFamily="34" charset="0"/>
-                <a:ea typeface="Times New Roman" pitchFamily="34" charset="-122"/>
-                <a:cs typeface="Times New Roman" pitchFamily="34" charset="-120"/>
-              </a:rPr>
-              <a:t>—</a:t>
-            </a:r>
-            <a:endParaRPr lang="en-US" sz="1000" dirty="0"/>
-          </a:p>
-        </p:txBody>
-      </p:sp>
-      <p:sp>
-        <p:nvSpPr>
-          <p:cNvPr id="64" name="Text 61"/>
-          <p:cNvSpPr/>
-          <p:nvPr/>
-        </p:nvSpPr>
-        <p:spPr>
-          <a:xfrm>
-            <a:off x="6172200" y="4279392"/>
-            <a:ext cx="960120" cy="201168"/>
-          </a:xfrm>
-          <a:prstGeom prst="rect">
-            <a:avLst/>
-          </a:prstGeom>
-          <a:noFill/>
-          <a:ln/>
-        </p:spPr>
-        <p:txBody>
-          <a:bodyPr wrap="square" lIns="0" tIns="0" rIns="0" bIns="0" rtlCol="0" anchor="ctr"/>
-          <a:lstStyle/>
-          <a:p>
-            <a:pPr algn="ctr" indent="0" marL="0">
-              <a:buNone/>
-            </a:pPr>
-            <a:r>
-              <a:rPr lang="en-US" sz="1000" dirty="0">
-                <a:solidFill>
-                  <a:srgbClr val="5A5470"/>
-                </a:solidFill>
-                <a:latin typeface="Times New Roman" pitchFamily="34" charset="0"/>
-                <a:ea typeface="Times New Roman" pitchFamily="34" charset="-122"/>
-                <a:cs typeface="Times New Roman" pitchFamily="34" charset="-120"/>
-              </a:rPr>
-              <a:t>—</a:t>
-            </a:r>
-            <a:endParaRPr lang="en-US" sz="1000" dirty="0"/>
-          </a:p>
-        </p:txBody>
-      </p:sp>
-      <p:sp>
-        <p:nvSpPr>
-          <p:cNvPr id="69" name="Text 66"/>
-          <p:cNvSpPr/>
-          <p:nvPr/>
-        </p:nvSpPr>
-        <p:spPr>
-          <a:xfrm>
-            <a:off x="6172200" y="4480560"/>
-            <a:ext cx="960120" cy="201168"/>
-          </a:xfrm>
-          <a:prstGeom prst="rect">
-            <a:avLst/>
-          </a:prstGeom>
-          <a:noFill/>
-          <a:ln/>
-        </p:spPr>
-        <p:txBody>
-          <a:bodyPr wrap="square" lIns="0" tIns="0" rIns="0" bIns="0" rtlCol="0" anchor="ctr"/>
-          <a:lstStyle/>
-          <a:p>
-            <a:pPr algn="ctr" indent="0" marL="0">
-              <a:buNone/>
-            </a:pPr>
-            <a:r>
-              <a:rPr lang="en-US" sz="1000" dirty="0">
-                <a:solidFill>
-                  <a:srgbClr val="5A5470"/>
-                </a:solidFill>
-                <a:latin typeface="Times New Roman" pitchFamily="34" charset="0"/>
-                <a:ea typeface="Times New Roman" pitchFamily="34" charset="-122"/>
-                <a:cs typeface="Times New Roman" pitchFamily="34" charset="-120"/>
-              </a:rPr>
-              <a:t>—</a:t>
-            </a:r>
-            <a:endParaRPr lang="en-US" sz="1000" dirty="0"/>
           </a:p>
         </p:txBody>
       </p:sp>
@@ -6377,10 +5890,6 @@
           </a:solidFill>
           <a:ln/>
         </p:spPr>
-        <p:txBody>
-          <a:bodyPr/>
-          <a:p/>
-        </p:txBody>
       </p:sp>
       <p:sp>
         <p:nvSpPr>
@@ -6391,7 +5900,7 @@
         <p:spPr>
           <a:xfrm>
             <a:off x="457200" y="1078992"/>
-            <a:ext cx="3886200" cy="201168"/>
+            <a:ext cx="5029200" cy="201168"/>
           </a:xfrm>
           <a:prstGeom prst="rect">
             <a:avLst/>
@@ -6429,8 +5938,8 @@
         </p:nvSpPr>
         <p:spPr>
           <a:xfrm>
-            <a:off x="4434840" y="1078992"/>
-            <a:ext cx="1600200" cy="201168"/>
+            <a:off x="5349240" y="1078992"/>
+            <a:ext cx="1920240" cy="201168"/>
           </a:xfrm>
           <a:prstGeom prst="rect">
             <a:avLst/>
@@ -6518,10 +6027,6 @@
           </a:solidFill>
           <a:ln/>
         </p:spPr>
-        <p:txBody>
-          <a:bodyPr/>
-          <a:p/>
-        </p:txBody>
       </p:sp>
       <p:sp>
         <p:nvSpPr>
@@ -6610,7 +6115,7 @@
         <p:spPr>
           <a:xfrm>
             <a:off x="457200" y="1499616"/>
-            <a:ext cx="3886200" cy="201168"/>
+            <a:ext cx="5029200" cy="201168"/>
           </a:xfrm>
           <a:prstGeom prst="rect">
             <a:avLst/>
@@ -6648,8 +6153,8 @@
         </p:nvSpPr>
         <p:spPr>
           <a:xfrm>
-            <a:off x="4434840" y="1499616"/>
-            <a:ext cx="1600200" cy="201168"/>
+            <a:off x="5349240" y="1499616"/>
+            <a:ext cx="1920240" cy="201168"/>
           </a:xfrm>
           <a:prstGeom prst="rect">
             <a:avLst/>
@@ -6700,10 +6205,6 @@
           </a:solidFill>
           <a:ln/>
         </p:spPr>
-        <p:txBody>
-          <a:bodyPr/>
-          <a:p/>
-        </p:txBody>
       </p:sp>
       <p:sp>
         <p:nvSpPr>
@@ -6763,10 +6264,6 @@
           </a:solidFill>
           <a:ln/>
         </p:spPr>
-        <p:txBody>
-          <a:bodyPr/>
-          <a:p/>
-        </p:txBody>
       </p:sp>
       <p:sp>
         <p:nvSpPr>
@@ -6777,7 +6274,7 @@
         <p:spPr>
           <a:xfrm>
             <a:off x="457200" y="1700784"/>
-            <a:ext cx="3886200" cy="201168"/>
+            <a:ext cx="5029200" cy="201168"/>
           </a:xfrm>
           <a:prstGeom prst="rect">
             <a:avLst/>
@@ -6815,8 +6312,8 @@
         </p:nvSpPr>
         <p:spPr>
           <a:xfrm>
-            <a:off x="4434840" y="1700784"/>
-            <a:ext cx="1600200" cy="201168"/>
+            <a:off x="5349240" y="1700784"/>
+            <a:ext cx="1920240" cy="201168"/>
           </a:xfrm>
           <a:prstGeom prst="rect">
             <a:avLst/>
@@ -6867,10 +6364,6 @@
           </a:solidFill>
           <a:ln/>
         </p:spPr>
-        <p:txBody>
-          <a:bodyPr/>
-          <a:p/>
-        </p:txBody>
       </p:sp>
       <p:sp>
         <p:nvSpPr>
@@ -6920,7 +6413,7 @@
         <p:spPr>
           <a:xfrm>
             <a:off x="457200" y="1901952"/>
-            <a:ext cx="3886200" cy="201168"/>
+            <a:ext cx="5029200" cy="201168"/>
           </a:xfrm>
           <a:prstGeom prst="rect">
             <a:avLst/>
@@ -6958,8 +6451,8 @@
         </p:nvSpPr>
         <p:spPr>
           <a:xfrm>
-            <a:off x="4434840" y="1901952"/>
-            <a:ext cx="1600200" cy="201168"/>
+            <a:off x="5349240" y="1901952"/>
+            <a:ext cx="1920240" cy="201168"/>
           </a:xfrm>
           <a:prstGeom prst="rect">
             <a:avLst/>
@@ -7010,10 +6503,6 @@
           </a:solidFill>
           <a:ln/>
         </p:spPr>
-        <p:txBody>
-          <a:bodyPr/>
-          <a:p/>
-        </p:txBody>
       </p:sp>
       <p:sp>
         <p:nvSpPr>
@@ -7073,10 +6562,6 @@
           </a:solidFill>
           <a:ln/>
         </p:spPr>
-        <p:txBody>
-          <a:bodyPr/>
-          <a:p/>
-        </p:txBody>
       </p:sp>
       <p:sp>
         <p:nvSpPr>
@@ -7087,7 +6572,7 @@
         <p:spPr>
           <a:xfrm>
             <a:off x="457200" y="2103120"/>
-            <a:ext cx="3886200" cy="201168"/>
+            <a:ext cx="5029200" cy="201168"/>
           </a:xfrm>
           <a:prstGeom prst="rect">
             <a:avLst/>
@@ -7125,8 +6610,8 @@
         </p:nvSpPr>
         <p:spPr>
           <a:xfrm>
-            <a:off x="4434840" y="2103120"/>
-            <a:ext cx="1600200" cy="201168"/>
+            <a:off x="5349240" y="2103120"/>
+            <a:ext cx="1920240" cy="201168"/>
           </a:xfrm>
           <a:prstGeom prst="rect">
             <a:avLst/>
@@ -7177,10 +6662,6 @@
           </a:solidFill>
           <a:ln/>
         </p:spPr>
-        <p:txBody>
-          <a:bodyPr/>
-          <a:p/>
-        </p:txBody>
       </p:sp>
       <p:sp>
         <p:nvSpPr>
@@ -7230,7 +6711,7 @@
         <p:spPr>
           <a:xfrm>
             <a:off x="457200" y="2304288"/>
-            <a:ext cx="3886200" cy="201168"/>
+            <a:ext cx="5029200" cy="201168"/>
           </a:xfrm>
           <a:prstGeom prst="rect">
             <a:avLst/>
@@ -7268,8 +6749,8 @@
         </p:nvSpPr>
         <p:spPr>
           <a:xfrm>
-            <a:off x="4434840" y="2304288"/>
-            <a:ext cx="1600200" cy="201168"/>
+            <a:off x="5349240" y="2304288"/>
+            <a:ext cx="1920240" cy="201168"/>
           </a:xfrm>
           <a:prstGeom prst="rect">
             <a:avLst/>
@@ -7320,10 +6801,6 @@
           </a:solidFill>
           <a:ln/>
         </p:spPr>
-        <p:txBody>
-          <a:bodyPr/>
-          <a:p/>
-        </p:txBody>
       </p:sp>
       <p:sp>
         <p:nvSpPr>
@@ -7383,10 +6860,6 @@
           </a:solidFill>
           <a:ln/>
         </p:spPr>
-        <p:txBody>
-          <a:bodyPr/>
-          <a:p/>
-        </p:txBody>
       </p:sp>
       <p:sp>
         <p:nvSpPr>
@@ -7397,7 +6870,7 @@
         <p:spPr>
           <a:xfrm>
             <a:off x="457200" y="2505456"/>
-            <a:ext cx="3886200" cy="201168"/>
+            <a:ext cx="5029200" cy="201168"/>
           </a:xfrm>
           <a:prstGeom prst="rect">
             <a:avLst/>
@@ -7435,8 +6908,8 @@
         </p:nvSpPr>
         <p:spPr>
           <a:xfrm>
-            <a:off x="4434840" y="2505456"/>
-            <a:ext cx="1600200" cy="201168"/>
+            <a:off x="5349240" y="2505456"/>
+            <a:ext cx="1920240" cy="201168"/>
           </a:xfrm>
           <a:prstGeom prst="rect">
             <a:avLst/>
@@ -7487,10 +6960,6 @@
           </a:solidFill>
           <a:ln/>
         </p:spPr>
-        <p:txBody>
-          <a:bodyPr/>
-          <a:p/>
-        </p:txBody>
       </p:sp>
       <p:sp>
         <p:nvSpPr>
@@ -7540,7 +7009,7 @@
         <p:spPr>
           <a:xfrm>
             <a:off x="457200" y="2706624"/>
-            <a:ext cx="3886200" cy="201168"/>
+            <a:ext cx="5029200" cy="201168"/>
           </a:xfrm>
           <a:prstGeom prst="rect">
             <a:avLst/>
@@ -7578,8 +7047,8 @@
         </p:nvSpPr>
         <p:spPr>
           <a:xfrm>
-            <a:off x="4434840" y="2706624"/>
-            <a:ext cx="1600200" cy="201168"/>
+            <a:off x="5349240" y="2706624"/>
+            <a:ext cx="1920240" cy="201168"/>
           </a:xfrm>
           <a:prstGeom prst="rect">
             <a:avLst/>
@@ -7630,10 +7099,6 @@
           </a:solidFill>
           <a:ln/>
         </p:spPr>
-        <p:txBody>
-          <a:bodyPr/>
-          <a:p/>
-        </p:txBody>
       </p:sp>
       <p:sp>
         <p:nvSpPr>
@@ -7693,10 +7158,6 @@
           </a:solidFill>
           <a:ln/>
         </p:spPr>
-        <p:txBody>
-          <a:bodyPr/>
-          <a:p/>
-        </p:txBody>
       </p:sp>
       <p:sp>
         <p:nvSpPr>
@@ -7785,7 +7246,7 @@
         <p:spPr>
           <a:xfrm>
             <a:off x="457200" y="3108960"/>
-            <a:ext cx="3886200" cy="201168"/>
+            <a:ext cx="5029200" cy="201168"/>
           </a:xfrm>
           <a:prstGeom prst="rect">
             <a:avLst/>
@@ -7823,8 +7284,8 @@
         </p:nvSpPr>
         <p:spPr>
           <a:xfrm>
-            <a:off x="4434840" y="3108960"/>
-            <a:ext cx="1600200" cy="201168"/>
+            <a:off x="5349240" y="3108960"/>
+            <a:ext cx="1920240" cy="201168"/>
           </a:xfrm>
           <a:prstGeom prst="rect">
             <a:avLst/>
@@ -7875,10 +7336,6 @@
           </a:solidFill>
           <a:ln/>
         </p:spPr>
-        <p:txBody>
-          <a:bodyPr/>
-          <a:p/>
-        </p:txBody>
       </p:sp>
       <p:sp>
         <p:nvSpPr>
@@ -7938,10 +7395,6 @@
           </a:solidFill>
           <a:ln/>
         </p:spPr>
-        <p:txBody>
-          <a:bodyPr/>
-          <a:p/>
-        </p:txBody>
       </p:sp>
       <p:sp>
         <p:nvSpPr>
@@ -7952,7 +7405,7 @@
         <p:spPr>
           <a:xfrm>
             <a:off x="457200" y="3310128"/>
-            <a:ext cx="3886200" cy="201168"/>
+            <a:ext cx="5029200" cy="201168"/>
           </a:xfrm>
           <a:prstGeom prst="rect">
             <a:avLst/>
@@ -7990,8 +7443,8 @@
         </p:nvSpPr>
         <p:spPr>
           <a:xfrm>
-            <a:off x="4434840" y="3310128"/>
-            <a:ext cx="1600200" cy="201168"/>
+            <a:off x="5349240" y="3310128"/>
+            <a:ext cx="1920240" cy="201168"/>
           </a:xfrm>
           <a:prstGeom prst="rect">
             <a:avLst/>
@@ -8042,10 +7495,6 @@
           </a:solidFill>
           <a:ln/>
         </p:spPr>
-        <p:txBody>
-          <a:bodyPr/>
-          <a:p/>
-        </p:txBody>
       </p:sp>
       <p:sp>
         <p:nvSpPr>
@@ -8095,7 +7544,7 @@
         <p:spPr>
           <a:xfrm>
             <a:off x="457200" y="3511296"/>
-            <a:ext cx="3886200" cy="201168"/>
+            <a:ext cx="5029200" cy="201168"/>
           </a:xfrm>
           <a:prstGeom prst="rect">
             <a:avLst/>
@@ -8133,8 +7582,8 @@
         </p:nvSpPr>
         <p:spPr>
           <a:xfrm>
-            <a:off x="4434840" y="3511296"/>
-            <a:ext cx="1600200" cy="201168"/>
+            <a:off x="5349240" y="3511296"/>
+            <a:ext cx="1920240" cy="201168"/>
           </a:xfrm>
           <a:prstGeom prst="rect">
             <a:avLst/>
@@ -8185,10 +7634,6 @@
           </a:solidFill>
           <a:ln/>
         </p:spPr>
-        <p:txBody>
-          <a:bodyPr/>
-          <a:p/>
-        </p:txBody>
       </p:sp>
       <p:sp>
         <p:nvSpPr>
@@ -8248,10 +7693,6 @@
           </a:solidFill>
           <a:ln/>
         </p:spPr>
-        <p:txBody>
-          <a:bodyPr/>
-          <a:p/>
-        </p:txBody>
       </p:sp>
       <p:sp>
         <p:nvSpPr>
@@ -8262,7 +7703,7 @@
         <p:spPr>
           <a:xfrm>
             <a:off x="457200" y="3712464"/>
-            <a:ext cx="3886200" cy="201168"/>
+            <a:ext cx="5029200" cy="201168"/>
           </a:xfrm>
           <a:prstGeom prst="rect">
             <a:avLst/>
@@ -8300,8 +7741,8 @@
         </p:nvSpPr>
         <p:spPr>
           <a:xfrm>
-            <a:off x="4434840" y="3712464"/>
-            <a:ext cx="1600200" cy="201168"/>
+            <a:off x="5349240" y="3712464"/>
+            <a:ext cx="1920240" cy="201168"/>
           </a:xfrm>
           <a:prstGeom prst="rect">
             <a:avLst/>
@@ -8352,10 +7793,6 @@
           </a:solidFill>
           <a:ln/>
         </p:spPr>
-        <p:txBody>
-          <a:bodyPr/>
-          <a:p/>
-        </p:txBody>
       </p:sp>
       <p:sp>
         <p:nvSpPr>
@@ -8405,7 +7842,7 @@
         <p:spPr>
           <a:xfrm>
             <a:off x="457200" y="3913632"/>
-            <a:ext cx="3886200" cy="201168"/>
+            <a:ext cx="5029200" cy="201168"/>
           </a:xfrm>
           <a:prstGeom prst="rect">
             <a:avLst/>
@@ -8443,8 +7880,8 @@
         </p:nvSpPr>
         <p:spPr>
           <a:xfrm>
-            <a:off x="4434840" y="3913632"/>
-            <a:ext cx="1600200" cy="201168"/>
+            <a:off x="5349240" y="3913632"/>
+            <a:ext cx="1920240" cy="201168"/>
           </a:xfrm>
           <a:prstGeom prst="rect">
             <a:avLst/>
@@ -8495,10 +7932,6 @@
           </a:solidFill>
           <a:ln/>
         </p:spPr>
-        <p:txBody>
-          <a:bodyPr/>
-          <a:p/>
-        </p:txBody>
       </p:sp>
       <p:sp>
         <p:nvSpPr>
@@ -8558,10 +7991,6 @@
           </a:solidFill>
           <a:ln/>
         </p:spPr>
-        <p:txBody>
-          <a:bodyPr/>
-          <a:p/>
-        </p:txBody>
       </p:sp>
       <p:sp>
         <p:nvSpPr>
@@ -8572,7 +8001,7 @@
         <p:spPr>
           <a:xfrm>
             <a:off x="457200" y="4114800"/>
-            <a:ext cx="3886200" cy="201168"/>
+            <a:ext cx="5029200" cy="201168"/>
           </a:xfrm>
           <a:prstGeom prst="rect">
             <a:avLst/>
@@ -8610,8 +8039,8 @@
         </p:nvSpPr>
         <p:spPr>
           <a:xfrm>
-            <a:off x="4434840" y="4114800"/>
-            <a:ext cx="1600200" cy="201168"/>
+            <a:off x="5349240" y="4114800"/>
+            <a:ext cx="1920240" cy="201168"/>
           </a:xfrm>
           <a:prstGeom prst="rect">
             <a:avLst/>
@@ -8662,10 +8091,6 @@
           </a:solidFill>
           <a:ln/>
         </p:spPr>
-        <p:txBody>
-          <a:bodyPr/>
-          <a:p/>
-        </p:txBody>
       </p:sp>
       <p:sp>
         <p:nvSpPr>
@@ -8715,7 +8140,7 @@
         <p:spPr>
           <a:xfrm>
             <a:off x="457200" y="4315968"/>
-            <a:ext cx="3886200" cy="201168"/>
+            <a:ext cx="5029200" cy="201168"/>
           </a:xfrm>
           <a:prstGeom prst="rect">
             <a:avLst/>
@@ -8753,8 +8178,8 @@
         </p:nvSpPr>
         <p:spPr>
           <a:xfrm>
-            <a:off x="4434840" y="4315968"/>
-            <a:ext cx="1600200" cy="201168"/>
+            <a:off x="5349240" y="4315968"/>
+            <a:ext cx="1920240" cy="201168"/>
           </a:xfrm>
           <a:prstGeom prst="rect">
             <a:avLst/>
@@ -8805,10 +8230,6 @@
           </a:solidFill>
           <a:ln/>
         </p:spPr>
-        <p:txBody>
-          <a:bodyPr/>
-          <a:p/>
-        </p:txBody>
       </p:sp>
       <p:sp>
         <p:nvSpPr>
@@ -8924,591 +8345,6 @@
               <a:t>CONFIDENTIAL · Page 3</a:t>
             </a:r>
             <a:endParaRPr lang="en-US" sz="700" dirty="0"/>
-          </a:p>
-        </p:txBody>
-      </p:sp>
-      <p:sp>
-        <p:nvSpPr>
-          <p:cNvPr id="11" name="Text 8"/>
-          <p:cNvSpPr/>
-          <p:nvPr/>
-        </p:nvSpPr>
-        <p:spPr>
-          <a:xfrm>
-            <a:off x="6172200" y="1078992"/>
-            <a:ext cx="960120" cy="201168"/>
-          </a:xfrm>
-          <a:prstGeom prst="rect">
-            <a:avLst/>
-          </a:prstGeom>
-          <a:noFill/>
-          <a:ln/>
-        </p:spPr>
-        <p:txBody>
-          <a:bodyPr wrap="square" lIns="0" tIns="0" rIns="0" bIns="0" rtlCol="0" anchor="ctr"/>
-          <a:lstStyle/>
-          <a:p>
-            <a:pPr algn="ctr" indent="0" marL="0">
-              <a:buNone/>
-            </a:pPr>
-            <a:r>
-              <a:rPr lang="en-US" sz="800" b="1" spc="100" kern="0" dirty="0">
-                <a:solidFill>
-                  <a:srgbClr val="FFFFFF"/>
-                </a:solidFill>
-                <a:latin typeface="Plus Jakarta Sans" pitchFamily="34" charset="0"/>
-                <a:ea typeface="Plus Jakarta Sans" pitchFamily="34" charset="-122"/>
-                <a:cs typeface="Plus Jakarta Sans" pitchFamily="34" charset="-120"/>
-              </a:rPr>
-              <a:t>NO SHOW</a:t>
-            </a:r>
-            <a:endParaRPr lang="en-US" sz="800" dirty="0"/>
-          </a:p>
-        </p:txBody>
-      </p:sp>
-      <p:sp>
-        <p:nvSpPr>
-          <p:cNvPr id="17" name="Text 14"/>
-          <p:cNvSpPr/>
-          <p:nvPr/>
-        </p:nvSpPr>
-        <p:spPr>
-          <a:xfrm>
-            <a:off x="6172200" y="1499616"/>
-            <a:ext cx="960120" cy="201168"/>
-          </a:xfrm>
-          <a:prstGeom prst="rect">
-            <a:avLst/>
-          </a:prstGeom>
-          <a:noFill/>
-          <a:ln/>
-        </p:spPr>
-        <p:txBody>
-          <a:bodyPr wrap="square" lIns="0" tIns="0" rIns="0" bIns="0" rtlCol="0" anchor="ctr"/>
-          <a:lstStyle/>
-          <a:p>
-            <a:pPr algn="ctr" indent="0" marL="0">
-              <a:buNone/>
-            </a:pPr>
-            <a:r>
-              <a:rPr lang="en-US" sz="1000" dirty="0">
-                <a:solidFill>
-                  <a:srgbClr val="5A5470"/>
-                </a:solidFill>
-                <a:latin typeface="Times New Roman" pitchFamily="34" charset="0"/>
-                <a:ea typeface="Times New Roman" pitchFamily="34" charset="-122"/>
-                <a:cs typeface="Times New Roman" pitchFamily="34" charset="-120"/>
-              </a:rPr>
-              <a:t>—</a:t>
-            </a:r>
-            <a:endParaRPr lang="en-US" sz="1000" dirty="0"/>
-          </a:p>
-        </p:txBody>
-      </p:sp>
-      <p:sp>
-        <p:nvSpPr>
-          <p:cNvPr id="22" name="Text 19"/>
-          <p:cNvSpPr/>
-          <p:nvPr/>
-        </p:nvSpPr>
-        <p:spPr>
-          <a:xfrm>
-            <a:off x="6172200" y="1700784"/>
-            <a:ext cx="960120" cy="201168"/>
-          </a:xfrm>
-          <a:prstGeom prst="rect">
-            <a:avLst/>
-          </a:prstGeom>
-          <a:noFill/>
-          <a:ln/>
-        </p:spPr>
-        <p:txBody>
-          <a:bodyPr wrap="square" lIns="0" tIns="0" rIns="0" bIns="0" rtlCol="0" anchor="ctr"/>
-          <a:lstStyle/>
-          <a:p>
-            <a:pPr algn="ctr" indent="0" marL="0">
-              <a:buNone/>
-            </a:pPr>
-            <a:r>
-              <a:rPr lang="en-US" sz="1000" dirty="0">
-                <a:solidFill>
-                  <a:srgbClr val="5A5470"/>
-                </a:solidFill>
-                <a:latin typeface="Times New Roman" pitchFamily="34" charset="0"/>
-                <a:ea typeface="Times New Roman" pitchFamily="34" charset="-122"/>
-                <a:cs typeface="Times New Roman" pitchFamily="34" charset="-120"/>
-              </a:rPr>
-              <a:t>—</a:t>
-            </a:r>
-            <a:endParaRPr lang="en-US" sz="1000" dirty="0"/>
-          </a:p>
-        </p:txBody>
-      </p:sp>
-      <p:sp>
-        <p:nvSpPr>
-          <p:cNvPr id="26" name="Text 23"/>
-          <p:cNvSpPr/>
-          <p:nvPr/>
-        </p:nvSpPr>
-        <p:spPr>
-          <a:xfrm>
-            <a:off x="6172200" y="1901952"/>
-            <a:ext cx="960120" cy="201168"/>
-          </a:xfrm>
-          <a:prstGeom prst="rect">
-            <a:avLst/>
-          </a:prstGeom>
-          <a:noFill/>
-          <a:ln/>
-        </p:spPr>
-        <p:txBody>
-          <a:bodyPr wrap="square" lIns="0" tIns="0" rIns="0" bIns="0" rtlCol="0" anchor="ctr"/>
-          <a:lstStyle/>
-          <a:p>
-            <a:pPr algn="ctr" indent="0" marL="0">
-              <a:buNone/>
-            </a:pPr>
-            <a:r>
-              <a:rPr lang="en-US" sz="1000" dirty="0">
-                <a:solidFill>
-                  <a:srgbClr val="5A5470"/>
-                </a:solidFill>
-                <a:latin typeface="Times New Roman" pitchFamily="34" charset="0"/>
-                <a:ea typeface="Times New Roman" pitchFamily="34" charset="-122"/>
-                <a:cs typeface="Times New Roman" pitchFamily="34" charset="-120"/>
-              </a:rPr>
-              <a:t>—</a:t>
-            </a:r>
-            <a:endParaRPr lang="en-US" sz="1000" dirty="0"/>
-          </a:p>
-        </p:txBody>
-      </p:sp>
-      <p:sp>
-        <p:nvSpPr>
-          <p:cNvPr id="31" name="Text 28"/>
-          <p:cNvSpPr/>
-          <p:nvPr/>
-        </p:nvSpPr>
-        <p:spPr>
-          <a:xfrm>
-            <a:off x="6172200" y="2103120"/>
-            <a:ext cx="960120" cy="201168"/>
-          </a:xfrm>
-          <a:prstGeom prst="rect">
-            <a:avLst/>
-          </a:prstGeom>
-          <a:noFill/>
-          <a:ln/>
-        </p:spPr>
-        <p:txBody>
-          <a:bodyPr wrap="square" lIns="0" tIns="0" rIns="0" bIns="0" rtlCol="0" anchor="ctr"/>
-          <a:lstStyle/>
-          <a:p>
-            <a:pPr algn="ctr" indent="0" marL="0">
-              <a:buNone/>
-            </a:pPr>
-            <a:r>
-              <a:rPr lang="en-US" sz="1000" dirty="0">
-                <a:solidFill>
-                  <a:srgbClr val="5A5470"/>
-                </a:solidFill>
-                <a:latin typeface="Times New Roman" pitchFamily="34" charset="0"/>
-                <a:ea typeface="Times New Roman" pitchFamily="34" charset="-122"/>
-                <a:cs typeface="Times New Roman" pitchFamily="34" charset="-120"/>
-              </a:rPr>
-              <a:t>—</a:t>
-            </a:r>
-            <a:endParaRPr lang="en-US" sz="1000" dirty="0"/>
-          </a:p>
-        </p:txBody>
-      </p:sp>
-      <p:sp>
-        <p:nvSpPr>
-          <p:cNvPr id="35" name="Text 32"/>
-          <p:cNvSpPr/>
-          <p:nvPr/>
-        </p:nvSpPr>
-        <p:spPr>
-          <a:xfrm>
-            <a:off x="6172200" y="2304288"/>
-            <a:ext cx="960120" cy="201168"/>
-          </a:xfrm>
-          <a:prstGeom prst="rect">
-            <a:avLst/>
-          </a:prstGeom>
-          <a:noFill/>
-          <a:ln/>
-        </p:spPr>
-        <p:txBody>
-          <a:bodyPr wrap="square" lIns="0" tIns="0" rIns="0" bIns="0" rtlCol="0" anchor="ctr"/>
-          <a:lstStyle/>
-          <a:p>
-            <a:pPr algn="ctr" indent="0" marL="0">
-              <a:buNone/>
-            </a:pPr>
-            <a:r>
-              <a:rPr lang="en-US" sz="1000" dirty="0">
-                <a:solidFill>
-                  <a:srgbClr val="5A5470"/>
-                </a:solidFill>
-                <a:latin typeface="Times New Roman" pitchFamily="34" charset="0"/>
-                <a:ea typeface="Times New Roman" pitchFamily="34" charset="-122"/>
-                <a:cs typeface="Times New Roman" pitchFamily="34" charset="-120"/>
-              </a:rPr>
-              <a:t>—</a:t>
-            </a:r>
-            <a:endParaRPr lang="en-US" sz="1000" dirty="0"/>
-          </a:p>
-        </p:txBody>
-      </p:sp>
-      <p:sp>
-        <p:nvSpPr>
-          <p:cNvPr id="40" name="Text 37"/>
-          <p:cNvSpPr/>
-          <p:nvPr/>
-        </p:nvSpPr>
-        <p:spPr>
-          <a:xfrm>
-            <a:off x="6172200" y="2505456"/>
-            <a:ext cx="960120" cy="201168"/>
-          </a:xfrm>
-          <a:prstGeom prst="rect">
-            <a:avLst/>
-          </a:prstGeom>
-          <a:noFill/>
-          <a:ln/>
-        </p:spPr>
-        <p:txBody>
-          <a:bodyPr wrap="square" lIns="0" tIns="0" rIns="0" bIns="0" rtlCol="0" anchor="ctr"/>
-          <a:lstStyle/>
-          <a:p>
-            <a:pPr algn="ctr" indent="0" marL="0">
-              <a:buNone/>
-            </a:pPr>
-            <a:r>
-              <a:rPr lang="en-US" sz="1000" dirty="0">
-                <a:solidFill>
-                  <a:srgbClr val="5A5470"/>
-                </a:solidFill>
-                <a:latin typeface="Times New Roman" pitchFamily="34" charset="0"/>
-                <a:ea typeface="Times New Roman" pitchFamily="34" charset="-122"/>
-                <a:cs typeface="Times New Roman" pitchFamily="34" charset="-120"/>
-              </a:rPr>
-              <a:t>—</a:t>
-            </a:r>
-            <a:endParaRPr lang="en-US" sz="1000" dirty="0"/>
-          </a:p>
-        </p:txBody>
-      </p:sp>
-      <p:sp>
-        <p:nvSpPr>
-          <p:cNvPr id="44" name="Text 41"/>
-          <p:cNvSpPr/>
-          <p:nvPr/>
-        </p:nvSpPr>
-        <p:spPr>
-          <a:xfrm>
-            <a:off x="6172200" y="2706624"/>
-            <a:ext cx="960120" cy="201168"/>
-          </a:xfrm>
-          <a:prstGeom prst="rect">
-            <a:avLst/>
-          </a:prstGeom>
-          <a:noFill/>
-          <a:ln/>
-        </p:spPr>
-        <p:txBody>
-          <a:bodyPr wrap="square" lIns="0" tIns="0" rIns="0" bIns="0" rtlCol="0" anchor="ctr"/>
-          <a:lstStyle/>
-          <a:p>
-            <a:pPr algn="ctr" indent="0" marL="0">
-              <a:buNone/>
-            </a:pPr>
-            <a:r>
-              <a:rPr lang="en-US" sz="1000" dirty="0">
-                <a:solidFill>
-                  <a:srgbClr val="5A5470"/>
-                </a:solidFill>
-                <a:latin typeface="Times New Roman" pitchFamily="34" charset="0"/>
-                <a:ea typeface="Times New Roman" pitchFamily="34" charset="-122"/>
-                <a:cs typeface="Times New Roman" pitchFamily="34" charset="-120"/>
-              </a:rPr>
-              <a:t>—</a:t>
-            </a:r>
-            <a:endParaRPr lang="en-US" sz="1000" dirty="0"/>
-          </a:p>
-        </p:txBody>
-      </p:sp>
-      <p:sp>
-        <p:nvSpPr>
-          <p:cNvPr id="51" name="Text 48"/>
-          <p:cNvSpPr/>
-          <p:nvPr/>
-        </p:nvSpPr>
-        <p:spPr>
-          <a:xfrm>
-            <a:off x="6172200" y="3108960"/>
-            <a:ext cx="960120" cy="201168"/>
-          </a:xfrm>
-          <a:prstGeom prst="rect">
-            <a:avLst/>
-          </a:prstGeom>
-          <a:noFill/>
-          <a:ln/>
-        </p:spPr>
-        <p:txBody>
-          <a:bodyPr wrap="square" lIns="0" tIns="0" rIns="0" bIns="0" rtlCol="0" anchor="ctr"/>
-          <a:lstStyle/>
-          <a:p>
-            <a:pPr algn="ctr" indent="0" marL="0">
-              <a:buNone/>
-            </a:pPr>
-            <a:r>
-              <a:rPr lang="en-US" sz="1000" dirty="0">
-                <a:solidFill>
-                  <a:srgbClr val="5A5470"/>
-                </a:solidFill>
-                <a:latin typeface="Times New Roman" pitchFamily="34" charset="0"/>
-                <a:ea typeface="Times New Roman" pitchFamily="34" charset="-122"/>
-                <a:cs typeface="Times New Roman" pitchFamily="34" charset="-120"/>
-              </a:rPr>
-              <a:t>—</a:t>
-            </a:r>
-            <a:endParaRPr lang="en-US" sz="1000" dirty="0"/>
-          </a:p>
-        </p:txBody>
-      </p:sp>
-      <p:sp>
-        <p:nvSpPr>
-          <p:cNvPr id="56" name="Text 53"/>
-          <p:cNvSpPr/>
-          <p:nvPr/>
-        </p:nvSpPr>
-        <p:spPr>
-          <a:xfrm>
-            <a:off x="6172200" y="3310128"/>
-            <a:ext cx="960120" cy="201168"/>
-          </a:xfrm>
-          <a:prstGeom prst="rect">
-            <a:avLst/>
-          </a:prstGeom>
-          <a:noFill/>
-          <a:ln/>
-        </p:spPr>
-        <p:txBody>
-          <a:bodyPr wrap="square" lIns="0" tIns="0" rIns="0" bIns="0" rtlCol="0" anchor="ctr"/>
-          <a:lstStyle/>
-          <a:p>
-            <a:pPr algn="ctr" indent="0" marL="0">
-              <a:buNone/>
-            </a:pPr>
-            <a:r>
-              <a:rPr lang="en-US" sz="1000" dirty="0">
-                <a:solidFill>
-                  <a:srgbClr val="5A5470"/>
-                </a:solidFill>
-                <a:latin typeface="Times New Roman" pitchFamily="34" charset="0"/>
-                <a:ea typeface="Times New Roman" pitchFamily="34" charset="-122"/>
-                <a:cs typeface="Times New Roman" pitchFamily="34" charset="-120"/>
-              </a:rPr>
-              <a:t>—</a:t>
-            </a:r>
-            <a:endParaRPr lang="en-US" sz="1000" dirty="0"/>
-          </a:p>
-        </p:txBody>
-      </p:sp>
-      <p:sp>
-        <p:nvSpPr>
-          <p:cNvPr id="60" name="Text 57"/>
-          <p:cNvSpPr/>
-          <p:nvPr/>
-        </p:nvSpPr>
-        <p:spPr>
-          <a:xfrm>
-            <a:off x="6172200" y="3511296"/>
-            <a:ext cx="960120" cy="201168"/>
-          </a:xfrm>
-          <a:prstGeom prst="rect">
-            <a:avLst/>
-          </a:prstGeom>
-          <a:noFill/>
-          <a:ln/>
-        </p:spPr>
-        <p:txBody>
-          <a:bodyPr wrap="square" lIns="0" tIns="0" rIns="0" bIns="0" rtlCol="0" anchor="ctr"/>
-          <a:lstStyle/>
-          <a:p>
-            <a:pPr algn="ctr" indent="0" marL="0">
-              <a:buNone/>
-            </a:pPr>
-            <a:r>
-              <a:rPr lang="en-US" sz="1000" dirty="0">
-                <a:solidFill>
-                  <a:srgbClr val="5A5470"/>
-                </a:solidFill>
-                <a:latin typeface="Times New Roman" pitchFamily="34" charset="0"/>
-                <a:ea typeface="Times New Roman" pitchFamily="34" charset="-122"/>
-                <a:cs typeface="Times New Roman" pitchFamily="34" charset="-120"/>
-              </a:rPr>
-              <a:t>—</a:t>
-            </a:r>
-            <a:endParaRPr lang="en-US" sz="1000" dirty="0"/>
-          </a:p>
-        </p:txBody>
-      </p:sp>
-      <p:sp>
-        <p:nvSpPr>
-          <p:cNvPr id="65" name="Text 62"/>
-          <p:cNvSpPr/>
-          <p:nvPr/>
-        </p:nvSpPr>
-        <p:spPr>
-          <a:xfrm>
-            <a:off x="6172200" y="3712464"/>
-            <a:ext cx="960120" cy="201168"/>
-          </a:xfrm>
-          <a:prstGeom prst="rect">
-            <a:avLst/>
-          </a:prstGeom>
-          <a:noFill/>
-          <a:ln/>
-        </p:spPr>
-        <p:txBody>
-          <a:bodyPr wrap="square" lIns="0" tIns="0" rIns="0" bIns="0" rtlCol="0" anchor="ctr"/>
-          <a:lstStyle/>
-          <a:p>
-            <a:pPr algn="ctr" indent="0" marL="0">
-              <a:buNone/>
-            </a:pPr>
-            <a:r>
-              <a:rPr lang="en-US" sz="1000" dirty="0">
-                <a:solidFill>
-                  <a:srgbClr val="5A5470"/>
-                </a:solidFill>
-                <a:latin typeface="Times New Roman" pitchFamily="34" charset="0"/>
-                <a:ea typeface="Times New Roman" pitchFamily="34" charset="-122"/>
-                <a:cs typeface="Times New Roman" pitchFamily="34" charset="-120"/>
-              </a:rPr>
-              <a:t>—</a:t>
-            </a:r>
-            <a:endParaRPr lang="en-US" sz="1000" dirty="0"/>
-          </a:p>
-        </p:txBody>
-      </p:sp>
-      <p:sp>
-        <p:nvSpPr>
-          <p:cNvPr id="69" name="Text 66"/>
-          <p:cNvSpPr/>
-          <p:nvPr/>
-        </p:nvSpPr>
-        <p:spPr>
-          <a:xfrm>
-            <a:off x="6172200" y="3913632"/>
-            <a:ext cx="960120" cy="201168"/>
-          </a:xfrm>
-          <a:prstGeom prst="rect">
-            <a:avLst/>
-          </a:prstGeom>
-          <a:noFill/>
-          <a:ln/>
-        </p:spPr>
-        <p:txBody>
-          <a:bodyPr wrap="square" lIns="0" tIns="0" rIns="0" bIns="0" rtlCol="0" anchor="ctr"/>
-          <a:lstStyle/>
-          <a:p>
-            <a:pPr algn="ctr" indent="0" marL="0">
-              <a:buNone/>
-            </a:pPr>
-            <a:r>
-              <a:rPr lang="en-US" sz="1000" dirty="0">
-                <a:solidFill>
-                  <a:srgbClr val="5A5470"/>
-                </a:solidFill>
-                <a:latin typeface="Times New Roman" pitchFamily="34" charset="0"/>
-                <a:ea typeface="Times New Roman" pitchFamily="34" charset="-122"/>
-                <a:cs typeface="Times New Roman" pitchFamily="34" charset="-120"/>
-              </a:rPr>
-              <a:t>—</a:t>
-            </a:r>
-            <a:endParaRPr lang="en-US" sz="1000" dirty="0"/>
-          </a:p>
-        </p:txBody>
-      </p:sp>
-      <p:sp>
-        <p:nvSpPr>
-          <p:cNvPr id="74" name="Text 71"/>
-          <p:cNvSpPr/>
-          <p:nvPr/>
-        </p:nvSpPr>
-        <p:spPr>
-          <a:xfrm>
-            <a:off x="6172200" y="4114800"/>
-            <a:ext cx="960120" cy="201168"/>
-          </a:xfrm>
-          <a:prstGeom prst="rect">
-            <a:avLst/>
-          </a:prstGeom>
-          <a:noFill/>
-          <a:ln/>
-        </p:spPr>
-        <p:txBody>
-          <a:bodyPr wrap="square" lIns="0" tIns="0" rIns="0" bIns="0" rtlCol="0" anchor="ctr"/>
-          <a:lstStyle/>
-          <a:p>
-            <a:pPr algn="ctr" indent="0" marL="0">
-              <a:buNone/>
-            </a:pPr>
-            <a:r>
-              <a:rPr lang="en-US" sz="1000" dirty="0">
-                <a:solidFill>
-                  <a:srgbClr val="5A5470"/>
-                </a:solidFill>
-                <a:latin typeface="Times New Roman" pitchFamily="34" charset="0"/>
-                <a:ea typeface="Times New Roman" pitchFamily="34" charset="-122"/>
-                <a:cs typeface="Times New Roman" pitchFamily="34" charset="-120"/>
-              </a:rPr>
-              <a:t>—</a:t>
-            </a:r>
-            <a:endParaRPr lang="en-US" sz="1000" dirty="0"/>
-          </a:p>
-        </p:txBody>
-      </p:sp>
-      <p:sp>
-        <p:nvSpPr>
-          <p:cNvPr id="78" name="Text 75"/>
-          <p:cNvSpPr/>
-          <p:nvPr/>
-        </p:nvSpPr>
-        <p:spPr>
-          <a:xfrm>
-            <a:off x="6172200" y="4315968"/>
-            <a:ext cx="960120" cy="201168"/>
-          </a:xfrm>
-          <a:prstGeom prst="rect">
-            <a:avLst/>
-          </a:prstGeom>
-          <a:noFill/>
-          <a:ln/>
-        </p:spPr>
-        <p:txBody>
-          <a:bodyPr wrap="square" lIns="0" tIns="0" rIns="0" bIns="0" rtlCol="0" anchor="ctr"/>
-          <a:lstStyle/>
-          <a:p>
-            <a:pPr algn="ctr" indent="0" marL="0">
-              <a:buNone/>
-            </a:pPr>
-            <a:r>
-              <a:rPr lang="en-US" sz="1000" dirty="0">
-                <a:solidFill>
-                  <a:srgbClr val="5A5470"/>
-                </a:solidFill>
-                <a:latin typeface="Times New Roman" pitchFamily="34" charset="0"/>
-                <a:ea typeface="Times New Roman" pitchFamily="34" charset="-122"/>
-                <a:cs typeface="Times New Roman" pitchFamily="34" charset="-120"/>
-              </a:rPr>
-              <a:t>—</a:t>
-            </a:r>
-            <a:endParaRPr lang="en-US" sz="1000" dirty="0"/>
           </a:p>
         </p:txBody>
       </p:sp>

--- a/template/Cluster2_Daily_Report_BLANK_Template.pptx
+++ b/template/Cluster2_Daily_Report_BLANK_Template.pptx
@@ -1297,6 +1297,10 @@
           </a:solidFill>
           <a:ln/>
         </p:spPr>
+        <p:txBody>
+          <a:bodyPr/>
+          <a:p/>
+        </p:txBody>
       </p:sp>
       <p:sp>
         <p:nvSpPr>
@@ -1436,6 +1440,10 @@
           </a:solidFill>
           <a:ln/>
         </p:spPr>
+        <p:txBody>
+          <a:bodyPr/>
+          <a:p/>
+        </p:txBody>
       </p:sp>
       <p:sp>
         <p:nvSpPr>
@@ -1575,6 +1583,10 @@
           </a:solidFill>
           <a:ln/>
         </p:spPr>
+        <p:txBody>
+          <a:bodyPr/>
+          <a:p/>
+        </p:txBody>
       </p:sp>
       <p:sp>
         <p:nvSpPr>
@@ -1712,6 +1724,10 @@
           </a:solidFill>
           <a:ln/>
         </p:spPr>
+        <p:txBody>
+          <a:bodyPr/>
+          <a:p/>
+        </p:txBody>
       </p:sp>
       <p:sp>
         <p:nvSpPr>
@@ -1771,6 +1787,10 @@
           </a:solidFill>
           <a:ln/>
         </p:spPr>
+        <p:txBody>
+          <a:bodyPr/>
+          <a:p/>
+        </p:txBody>
       </p:sp>
       <p:sp>
         <p:nvSpPr>
@@ -2025,6 +2045,10 @@
           </a:solidFill>
           <a:ln/>
         </p:spPr>
+        <p:txBody>
+          <a:bodyPr/>
+          <a:p/>
+        </p:txBody>
       </p:sp>
       <p:sp>
         <p:nvSpPr>
@@ -2242,6 +2266,10 @@
           </a:solidFill>
           <a:ln/>
         </p:spPr>
+        <p:txBody>
+          <a:bodyPr/>
+          <a:p/>
+        </p:txBody>
       </p:sp>
       <p:sp>
         <p:nvSpPr>
@@ -2498,6 +2526,10 @@
           </a:solidFill>
           <a:ln/>
         </p:spPr>
+        <p:txBody>
+          <a:bodyPr/>
+          <a:p/>
+        </p:txBody>
       </p:sp>
       <p:sp>
         <p:nvSpPr>
@@ -2557,6 +2589,10 @@
           </a:solidFill>
           <a:ln/>
         </p:spPr>
+        <p:txBody>
+          <a:bodyPr/>
+          <a:p/>
+        </p:txBody>
       </p:sp>
       <p:sp>
         <p:nvSpPr>
@@ -2774,6 +2810,10 @@
           </a:solidFill>
           <a:ln/>
         </p:spPr>
+        <p:txBody>
+          <a:bodyPr/>
+          <a:p/>
+        </p:txBody>
       </p:sp>
       <p:sp>
         <p:nvSpPr>
@@ -3030,6 +3070,10 @@
           </a:solidFill>
           <a:ln/>
         </p:spPr>
+        <p:txBody>
+          <a:bodyPr/>
+          <a:p/>
+        </p:txBody>
       </p:sp>
       <p:sp>
         <p:nvSpPr>
@@ -3091,6 +3135,10 @@
           </a:solidFill>
           <a:ln/>
         </p:spPr>
+        <p:txBody>
+          <a:bodyPr/>
+          <a:p/>
+        </p:txBody>
       </p:sp>
       <p:sp>
         <p:nvSpPr>
@@ -3474,6 +3522,10 @@
           </a:solidFill>
           <a:ln/>
         </p:spPr>
+        <p:txBody>
+          <a:bodyPr/>
+          <a:p/>
+        </p:txBody>
       </p:sp>
       <p:sp>
         <p:nvSpPr>
@@ -3762,6 +3814,10 @@
             <a:prstDash val="solid"/>
           </a:ln>
         </p:spPr>
+        <p:txBody>
+          <a:bodyPr/>
+          <a:p/>
+        </p:txBody>
       </p:sp>
       <p:sp>
         <p:nvSpPr>
@@ -3785,6 +3841,10 @@
             <a:prstDash val="solid"/>
           </a:ln>
         </p:spPr>
+        <p:txBody>
+          <a:bodyPr/>
+          <a:p/>
+        </p:txBody>
       </p:sp>
       <p:sp>
         <p:nvSpPr>
@@ -3807,6 +3867,10 @@
           </a:solidFill>
           <a:ln/>
         </p:spPr>
+        <p:txBody>
+          <a:bodyPr/>
+          <a:p/>
+        </p:txBody>
       </p:sp>
       <p:sp>
         <p:nvSpPr>
@@ -3894,6 +3958,10 @@
           </a:solidFill>
           <a:ln/>
         </p:spPr>
+        <p:txBody>
+          <a:bodyPr/>
+          <a:p/>
+        </p:txBody>
       </p:sp>
       <p:sp>
         <p:nvSpPr>
@@ -3953,6 +4021,10 @@
           </a:solidFill>
           <a:ln/>
         </p:spPr>
+        <p:txBody>
+          <a:bodyPr/>
+          <a:p/>
+        </p:txBody>
       </p:sp>
       <p:sp>
         <p:nvSpPr>
@@ -4012,6 +4084,10 @@
           </a:solidFill>
           <a:ln/>
         </p:spPr>
+        <p:txBody>
+          <a:bodyPr/>
+          <a:p/>
+        </p:txBody>
       </p:sp>
       <p:sp>
         <p:nvSpPr>
@@ -4071,6 +4147,10 @@
           </a:solidFill>
           <a:ln/>
         </p:spPr>
+        <p:txBody>
+          <a:bodyPr/>
+          <a:p/>
+        </p:txBody>
       </p:sp>
       <p:sp>
         <p:nvSpPr>
@@ -4208,6 +4288,10 @@
           </a:solidFill>
           <a:ln/>
         </p:spPr>
+        <p:txBody>
+          <a:bodyPr/>
+          <a:p/>
+        </p:txBody>
       </p:sp>
       <p:sp>
         <p:nvSpPr>
@@ -4281,7 +4365,18 @@
                 <a:ea typeface="Plus Jakarta Sans" pitchFamily="34" charset="-122"/>
                 <a:cs typeface="Plus Jakarta Sans" pitchFamily="34" charset="-120"/>
               </a:rPr>
-              <a:t>—/— · —%</a:t>
+              <a:t>—/— · </a:t>
+            </a:r>
+            <a:r>
+              <a:rPr lang="en-US" sz="850" dirty="0" b="1">
+                <a:solidFill>
+                  <a:srgbClr val="D7D2E9"/>
+                </a:solidFill>
+                <a:latin typeface="Plus Jakarta Sans" pitchFamily="34" charset="0"/>
+                <a:ea typeface="Plus Jakarta Sans" pitchFamily="34" charset="-122"/>
+                <a:cs typeface="Plus Jakarta Sans" pitchFamily="34" charset="-120"/>
+              </a:rPr>
+              <a:t>—%</a:t>
             </a:r>
             <a:endParaRPr lang="en-US" sz="850" dirty="0"/>
           </a:p>
@@ -4386,6 +4481,10 @@
           </a:solidFill>
           <a:ln/>
         </p:spPr>
+        <p:txBody>
+          <a:bodyPr/>
+          <a:p/>
+        </p:txBody>
       </p:sp>
       <p:sp>
         <p:nvSpPr>
@@ -4445,6 +4544,10 @@
           </a:solidFill>
           <a:ln/>
         </p:spPr>
+        <p:txBody>
+          <a:bodyPr/>
+          <a:p/>
+        </p:txBody>
       </p:sp>
       <p:sp>
         <p:nvSpPr>
@@ -4545,6 +4648,10 @@
           </a:solidFill>
           <a:ln/>
         </p:spPr>
+        <p:txBody>
+          <a:bodyPr/>
+          <a:p/>
+        </p:txBody>
       </p:sp>
       <p:sp>
         <p:nvSpPr>
@@ -4684,6 +4791,10 @@
           </a:solidFill>
           <a:ln/>
         </p:spPr>
+        <p:txBody>
+          <a:bodyPr/>
+          <a:p/>
+        </p:txBody>
       </p:sp>
       <p:sp>
         <p:nvSpPr>
@@ -4743,6 +4854,10 @@
           </a:solidFill>
           <a:ln/>
         </p:spPr>
+        <p:txBody>
+          <a:bodyPr/>
+          <a:p/>
+        </p:txBody>
       </p:sp>
       <p:sp>
         <p:nvSpPr>
@@ -4843,6 +4958,10 @@
           </a:solidFill>
           <a:ln/>
         </p:spPr>
+        <p:txBody>
+          <a:bodyPr/>
+          <a:p/>
+        </p:txBody>
       </p:sp>
       <p:sp>
         <p:nvSpPr>
@@ -4902,6 +5021,10 @@
           </a:solidFill>
           <a:ln/>
         </p:spPr>
+        <p:txBody>
+          <a:bodyPr/>
+          <a:p/>
+        </p:txBody>
       </p:sp>
       <p:sp>
         <p:nvSpPr>
@@ -4975,7 +5098,18 @@
                 <a:ea typeface="Plus Jakarta Sans" pitchFamily="34" charset="-122"/>
                 <a:cs typeface="Plus Jakarta Sans" pitchFamily="34" charset="-120"/>
               </a:rPr>
-              <a:t>—/— · —%</a:t>
+              <a:t>—/— · </a:t>
+            </a:r>
+            <a:r>
+              <a:rPr lang="en-US" sz="850" dirty="0" b="1">
+                <a:solidFill>
+                  <a:srgbClr val="D7D2E9"/>
+                </a:solidFill>
+                <a:latin typeface="Plus Jakarta Sans" pitchFamily="34" charset="0"/>
+                <a:ea typeface="Plus Jakarta Sans" pitchFamily="34" charset="-122"/>
+                <a:cs typeface="Plus Jakarta Sans" pitchFamily="34" charset="-120"/>
+              </a:rPr>
+              <a:t>—%</a:t>
             </a:r>
             <a:endParaRPr lang="en-US" sz="850" dirty="0"/>
           </a:p>
@@ -5080,6 +5214,10 @@
           </a:solidFill>
           <a:ln/>
         </p:spPr>
+        <p:txBody>
+          <a:bodyPr/>
+          <a:p/>
+        </p:txBody>
       </p:sp>
       <p:sp>
         <p:nvSpPr>
@@ -5139,6 +5277,10 @@
           </a:solidFill>
           <a:ln/>
         </p:spPr>
+        <p:txBody>
+          <a:bodyPr/>
+          <a:p/>
+        </p:txBody>
       </p:sp>
       <p:sp>
         <p:nvSpPr>
@@ -5239,6 +5381,10 @@
           </a:solidFill>
           <a:ln/>
         </p:spPr>
+        <p:txBody>
+          <a:bodyPr/>
+          <a:p/>
+        </p:txBody>
       </p:sp>
       <p:sp>
         <p:nvSpPr>
@@ -5378,6 +5524,10 @@
           </a:solidFill>
           <a:ln/>
         </p:spPr>
+        <p:txBody>
+          <a:bodyPr/>
+          <a:p/>
+        </p:txBody>
       </p:sp>
       <p:sp>
         <p:nvSpPr>
@@ -5437,6 +5587,10 @@
           </a:solidFill>
           <a:ln/>
         </p:spPr>
+        <p:txBody>
+          <a:bodyPr/>
+          <a:p/>
+        </p:txBody>
       </p:sp>
       <p:sp>
         <p:nvSpPr>
@@ -5537,6 +5691,10 @@
           </a:solidFill>
           <a:ln/>
         </p:spPr>
+        <p:txBody>
+          <a:bodyPr/>
+          <a:p/>
+        </p:txBody>
       </p:sp>
       <p:sp>
         <p:nvSpPr>
@@ -5890,6 +6048,10 @@
           </a:solidFill>
           <a:ln/>
         </p:spPr>
+        <p:txBody>
+          <a:bodyPr/>
+          <a:p/>
+        </p:txBody>
       </p:sp>
       <p:sp>
         <p:nvSpPr>
@@ -6027,6 +6189,10 @@
           </a:solidFill>
           <a:ln/>
         </p:spPr>
+        <p:txBody>
+          <a:bodyPr/>
+          <a:p/>
+        </p:txBody>
       </p:sp>
       <p:sp>
         <p:nvSpPr>
@@ -6100,7 +6266,18 @@
                 <a:ea typeface="Plus Jakarta Sans" pitchFamily="34" charset="-122"/>
                 <a:cs typeface="Plus Jakarta Sans" pitchFamily="34" charset="-120"/>
               </a:rPr>
-              <a:t>—/— · —%</a:t>
+              <a:t>—/— · </a:t>
+            </a:r>
+            <a:r>
+              <a:rPr lang="en-US" sz="850" dirty="0" b="1">
+                <a:solidFill>
+                  <a:srgbClr val="D7D2E9"/>
+                </a:solidFill>
+                <a:latin typeface="Plus Jakarta Sans" pitchFamily="34" charset="0"/>
+                <a:ea typeface="Plus Jakarta Sans" pitchFamily="34" charset="-122"/>
+                <a:cs typeface="Plus Jakarta Sans" pitchFamily="34" charset="-120"/>
+              </a:rPr>
+              <a:t>—%</a:t>
             </a:r>
             <a:endParaRPr lang="en-US" sz="850" dirty="0"/>
           </a:p>
@@ -6205,6 +6382,10 @@
           </a:solidFill>
           <a:ln/>
         </p:spPr>
+        <p:txBody>
+          <a:bodyPr/>
+          <a:p/>
+        </p:txBody>
       </p:sp>
       <p:sp>
         <p:nvSpPr>
@@ -6264,6 +6445,10 @@
           </a:solidFill>
           <a:ln/>
         </p:spPr>
+        <p:txBody>
+          <a:bodyPr/>
+          <a:p/>
+        </p:txBody>
       </p:sp>
       <p:sp>
         <p:nvSpPr>
@@ -6364,6 +6549,10 @@
           </a:solidFill>
           <a:ln/>
         </p:spPr>
+        <p:txBody>
+          <a:bodyPr/>
+          <a:p/>
+        </p:txBody>
       </p:sp>
       <p:sp>
         <p:nvSpPr>
@@ -6503,6 +6692,10 @@
           </a:solidFill>
           <a:ln/>
         </p:spPr>
+        <p:txBody>
+          <a:bodyPr/>
+          <a:p/>
+        </p:txBody>
       </p:sp>
       <p:sp>
         <p:nvSpPr>
@@ -6562,6 +6755,10 @@
           </a:solidFill>
           <a:ln/>
         </p:spPr>
+        <p:txBody>
+          <a:bodyPr/>
+          <a:p/>
+        </p:txBody>
       </p:sp>
       <p:sp>
         <p:nvSpPr>
@@ -6662,6 +6859,10 @@
           </a:solidFill>
           <a:ln/>
         </p:spPr>
+        <p:txBody>
+          <a:bodyPr/>
+          <a:p/>
+        </p:txBody>
       </p:sp>
       <p:sp>
         <p:nvSpPr>
@@ -6801,6 +7002,10 @@
           </a:solidFill>
           <a:ln/>
         </p:spPr>
+        <p:txBody>
+          <a:bodyPr/>
+          <a:p/>
+        </p:txBody>
       </p:sp>
       <p:sp>
         <p:nvSpPr>
@@ -6860,6 +7065,10 @@
           </a:solidFill>
           <a:ln/>
         </p:spPr>
+        <p:txBody>
+          <a:bodyPr/>
+          <a:p/>
+        </p:txBody>
       </p:sp>
       <p:sp>
         <p:nvSpPr>
@@ -6960,6 +7169,10 @@
           </a:solidFill>
           <a:ln/>
         </p:spPr>
+        <p:txBody>
+          <a:bodyPr/>
+          <a:p/>
+        </p:txBody>
       </p:sp>
       <p:sp>
         <p:nvSpPr>
@@ -7099,6 +7312,10 @@
           </a:solidFill>
           <a:ln/>
         </p:spPr>
+        <p:txBody>
+          <a:bodyPr/>
+          <a:p/>
+        </p:txBody>
       </p:sp>
       <p:sp>
         <p:nvSpPr>
@@ -7158,6 +7375,10 @@
           </a:solidFill>
           <a:ln/>
         </p:spPr>
+        <p:txBody>
+          <a:bodyPr/>
+          <a:p/>
+        </p:txBody>
       </p:sp>
       <p:sp>
         <p:nvSpPr>
@@ -7231,7 +7452,18 @@
                 <a:ea typeface="Plus Jakarta Sans" pitchFamily="34" charset="-122"/>
                 <a:cs typeface="Plus Jakarta Sans" pitchFamily="34" charset="-120"/>
               </a:rPr>
-              <a:t>—/— · —%</a:t>
+              <a:t>—/— · </a:t>
+            </a:r>
+            <a:r>
+              <a:rPr lang="en-US" sz="850" dirty="0" b="1">
+                <a:solidFill>
+                  <a:srgbClr val="D7D2E9"/>
+                </a:solidFill>
+                <a:latin typeface="Plus Jakarta Sans" pitchFamily="34" charset="0"/>
+                <a:ea typeface="Plus Jakarta Sans" pitchFamily="34" charset="-122"/>
+                <a:cs typeface="Plus Jakarta Sans" pitchFamily="34" charset="-120"/>
+              </a:rPr>
+              <a:t>—%</a:t>
             </a:r>
             <a:endParaRPr lang="en-US" sz="850" dirty="0"/>
           </a:p>
@@ -7336,6 +7568,10 @@
           </a:solidFill>
           <a:ln/>
         </p:spPr>
+        <p:txBody>
+          <a:bodyPr/>
+          <a:p/>
+        </p:txBody>
       </p:sp>
       <p:sp>
         <p:nvSpPr>
@@ -7395,6 +7631,10 @@
           </a:solidFill>
           <a:ln/>
         </p:spPr>
+        <p:txBody>
+          <a:bodyPr/>
+          <a:p/>
+        </p:txBody>
       </p:sp>
       <p:sp>
         <p:nvSpPr>
@@ -7495,6 +7735,10 @@
           </a:solidFill>
           <a:ln/>
         </p:spPr>
+        <p:txBody>
+          <a:bodyPr/>
+          <a:p/>
+        </p:txBody>
       </p:sp>
       <p:sp>
         <p:nvSpPr>
@@ -7634,6 +7878,10 @@
           </a:solidFill>
           <a:ln/>
         </p:spPr>
+        <p:txBody>
+          <a:bodyPr/>
+          <a:p/>
+        </p:txBody>
       </p:sp>
       <p:sp>
         <p:nvSpPr>
@@ -7693,6 +7941,10 @@
           </a:solidFill>
           <a:ln/>
         </p:spPr>
+        <p:txBody>
+          <a:bodyPr/>
+          <a:p/>
+        </p:txBody>
       </p:sp>
       <p:sp>
         <p:nvSpPr>
@@ -7793,6 +8045,10 @@
           </a:solidFill>
           <a:ln/>
         </p:spPr>
+        <p:txBody>
+          <a:bodyPr/>
+          <a:p/>
+        </p:txBody>
       </p:sp>
       <p:sp>
         <p:nvSpPr>
@@ -7932,6 +8188,10 @@
           </a:solidFill>
           <a:ln/>
         </p:spPr>
+        <p:txBody>
+          <a:bodyPr/>
+          <a:p/>
+        </p:txBody>
       </p:sp>
       <p:sp>
         <p:nvSpPr>
@@ -7991,6 +8251,10 @@
           </a:solidFill>
           <a:ln/>
         </p:spPr>
+        <p:txBody>
+          <a:bodyPr/>
+          <a:p/>
+        </p:txBody>
       </p:sp>
       <p:sp>
         <p:nvSpPr>
@@ -8091,6 +8355,10 @@
           </a:solidFill>
           <a:ln/>
         </p:spPr>
+        <p:txBody>
+          <a:bodyPr/>
+          <a:p/>
+        </p:txBody>
       </p:sp>
       <p:sp>
         <p:nvSpPr>
@@ -8230,6 +8498,10 @@
           </a:solidFill>
           <a:ln/>
         </p:spPr>
+        <p:txBody>
+          <a:bodyPr/>
+          <a:p/>
+        </p:txBody>
       </p:sp>
       <p:sp>
         <p:nvSpPr>

--- a/template/Cluster2_Daily_Report_BLANK_Template.pptx
+++ b/template/Cluster2_Daily_Report_BLANK_Template.pptx
@@ -3116,13 +3116,273 @@
       </p:sp>
       <p:sp>
         <p:nvSpPr>
+          <p:cNvPr id="65" name="Text 62"/>
+          <p:cNvSpPr/>
+          <p:nvPr/>
+        </p:nvSpPr>
+        <p:spPr>
+          <a:xfrm>
+            <a:off x="457200" y="3950208"/>
+            <a:ext cx="2240280" cy="256032"/>
+          </a:xfrm>
+          <a:prstGeom prst="rect">
+            <a:avLst/>
+          </a:prstGeom>
+          <a:noFill/>
+          <a:ln/>
+        </p:spPr>
+        <p:txBody>
+          <a:bodyPr wrap="square" lIns="0" tIns="0" rIns="0" bIns="0" rtlCol="0" anchor="ctr"/>
+          <a:lstStyle/>
+          <a:p>
+            <a:pPr indent="0" marL="0">
+              <a:buNone/>
+            </a:pPr>
+            <a:r>
+              <a:rPr lang="en-US" sz="1000" b="1" dirty="0">
+                <a:solidFill>
+                  <a:srgbClr val="1E1A33"/>
+                </a:solidFill>
+                <a:latin typeface="Times New Roman" pitchFamily="34" charset="0"/>
+                <a:ea typeface="Times New Roman" pitchFamily="34" charset="-122"/>
+                <a:cs typeface="Times New Roman" pitchFamily="34" charset="-120"/>
+              </a:rPr>
+              <a:t>Al Khobar</a:t>
+            </a:r>
+            <a:endParaRPr lang="en-US" sz="1000" dirty="0"/>
+          </a:p>
+        </p:txBody>
+      </p:sp>
+      <p:sp>
+        <p:nvSpPr>
+          <p:cNvPr id="66" name="Text 63"/>
+          <p:cNvSpPr/>
+          <p:nvPr/>
+        </p:nvSpPr>
+        <p:spPr>
+          <a:xfrm>
+            <a:off x="2697480" y="3950208"/>
+            <a:ext cx="1234440" cy="256032"/>
+          </a:xfrm>
+          <a:prstGeom prst="rect">
+            <a:avLst/>
+          </a:prstGeom>
+          <a:noFill/>
+          <a:ln/>
+        </p:spPr>
+        <p:txBody>
+          <a:bodyPr wrap="square" lIns="0" tIns="0" rIns="0" bIns="0" rtlCol="0" anchor="ctr"/>
+          <a:lstStyle/>
+          <a:p>
+            <a:pPr algn="ctr" indent="0" marL="0">
+              <a:buNone/>
+            </a:pPr>
+            <a:r>
+              <a:rPr lang="en-US" sz="1000" dirty="0">
+                <a:solidFill>
+                  <a:srgbClr val="5A5470"/>
+                </a:solidFill>
+                <a:latin typeface="Times New Roman" pitchFamily="34" charset="0"/>
+                <a:ea typeface="Times New Roman" pitchFamily="34" charset="-122"/>
+                <a:cs typeface="Times New Roman" pitchFamily="34" charset="-120"/>
+              </a:rPr>
+              <a:t>—</a:t>
+            </a:r>
+            <a:endParaRPr lang="en-US" sz="1000" dirty="0"/>
+          </a:p>
+        </p:txBody>
+      </p:sp>
+      <p:sp>
+        <p:nvSpPr>
+          <p:cNvPr id="67" name="Text 64"/>
+          <p:cNvSpPr/>
+          <p:nvPr/>
+        </p:nvSpPr>
+        <p:spPr>
+          <a:xfrm>
+            <a:off x="3931920" y="3950208"/>
+            <a:ext cx="1234440" cy="256032"/>
+          </a:xfrm>
+          <a:prstGeom prst="rect">
+            <a:avLst/>
+          </a:prstGeom>
+          <a:noFill/>
+          <a:ln/>
+        </p:spPr>
+        <p:txBody>
+          <a:bodyPr wrap="square" lIns="0" tIns="0" rIns="0" bIns="0" rtlCol="0" anchor="ctr"/>
+          <a:lstStyle/>
+          <a:p>
+            <a:pPr algn="ctr" indent="0" marL="0">
+              <a:buNone/>
+            </a:pPr>
+            <a:r>
+              <a:rPr lang="en-US" sz="1000" dirty="0">
+                <a:solidFill>
+                  <a:srgbClr val="5A5470"/>
+                </a:solidFill>
+                <a:latin typeface="Times New Roman" pitchFamily="34" charset="0"/>
+                <a:ea typeface="Times New Roman" pitchFamily="34" charset="-122"/>
+                <a:cs typeface="Times New Roman" pitchFamily="34" charset="-120"/>
+              </a:rPr>
+              <a:t>—</a:t>
+            </a:r>
+            <a:endParaRPr lang="en-US" sz="1000" dirty="0"/>
+          </a:p>
+        </p:txBody>
+      </p:sp>
+      <p:sp>
+        <p:nvSpPr>
+          <p:cNvPr id="68" name="Text 65"/>
+          <p:cNvSpPr/>
+          <p:nvPr/>
+        </p:nvSpPr>
+        <p:spPr>
+          <a:xfrm>
+            <a:off x="5166360" y="3950208"/>
+            <a:ext cx="1234440" cy="256032"/>
+          </a:xfrm>
+          <a:prstGeom prst="rect">
+            <a:avLst/>
+          </a:prstGeom>
+          <a:noFill/>
+          <a:ln/>
+        </p:spPr>
+        <p:txBody>
+          <a:bodyPr wrap="square" lIns="0" tIns="0" rIns="0" bIns="0" rtlCol="0" anchor="ctr"/>
+          <a:lstStyle/>
+          <a:p>
+            <a:pPr algn="ctr" indent="0" marL="0">
+              <a:buNone/>
+            </a:pPr>
+            <a:r>
+              <a:rPr lang="en-US" sz="1000" dirty="0">
+                <a:solidFill>
+                  <a:srgbClr val="5A5470"/>
+                </a:solidFill>
+                <a:latin typeface="Times New Roman" pitchFamily="34" charset="0"/>
+                <a:ea typeface="Times New Roman" pitchFamily="34" charset="-122"/>
+                <a:cs typeface="Times New Roman" pitchFamily="34" charset="-120"/>
+              </a:rPr>
+              <a:t>—</a:t>
+            </a:r>
+            <a:endParaRPr lang="en-US" sz="1000" dirty="0"/>
+          </a:p>
+        </p:txBody>
+      </p:sp>
+      <p:sp>
+        <p:nvSpPr>
+          <p:cNvPr id="69" name="Text 66"/>
+          <p:cNvSpPr/>
+          <p:nvPr/>
+        </p:nvSpPr>
+        <p:spPr>
+          <a:xfrm>
+            <a:off x="6400800" y="3950208"/>
+            <a:ext cx="1234440" cy="256032"/>
+          </a:xfrm>
+          <a:prstGeom prst="rect">
+            <a:avLst/>
+          </a:prstGeom>
+          <a:noFill/>
+          <a:ln/>
+        </p:spPr>
+        <p:txBody>
+          <a:bodyPr wrap="square" lIns="0" tIns="0" rIns="0" bIns="0" rtlCol="0" anchor="ctr"/>
+          <a:lstStyle/>
+          <a:p>
+            <a:pPr algn="ctr" indent="0" marL="0">
+              <a:buNone/>
+            </a:pPr>
+            <a:r>
+              <a:rPr lang="en-US" sz="1000" dirty="0">
+                <a:solidFill>
+                  <a:srgbClr val="5A5470"/>
+                </a:solidFill>
+                <a:latin typeface="Times New Roman" pitchFamily="34" charset="0"/>
+                <a:ea typeface="Times New Roman" pitchFamily="34" charset="-122"/>
+                <a:cs typeface="Times New Roman" pitchFamily="34" charset="-120"/>
+              </a:rPr>
+              <a:t>—</a:t>
+            </a:r>
+            <a:endParaRPr lang="en-US" sz="1000" dirty="0"/>
+          </a:p>
+        </p:txBody>
+      </p:sp>
+      <p:sp>
+        <p:nvSpPr>
+          <p:cNvPr id="70" name="Shape 67"/>
+          <p:cNvSpPr/>
+          <p:nvPr/>
+        </p:nvSpPr>
+        <p:spPr>
+          <a:xfrm>
+            <a:off x="7882128" y="3991356"/>
+            <a:ext cx="694944" cy="173736"/>
+          </a:xfrm>
+          <a:prstGeom prst="roundRect">
+            <a:avLst>
+              <a:gd name="adj" fmla="val 47368"/>
+            </a:avLst>
+          </a:prstGeom>
+          <a:solidFill>
+            <a:srgbClr val="D7D2E9"/>
+          </a:solidFill>
+          <a:ln/>
+        </p:spPr>
+        <p:txBody>
+          <a:bodyPr/>
+          <a:p/>
+        </p:txBody>
+      </p:sp>
+      <p:sp>
+        <p:nvSpPr>
+          <p:cNvPr id="71" name="Text 68"/>
+          <p:cNvSpPr/>
+          <p:nvPr/>
+        </p:nvSpPr>
+        <p:spPr>
+          <a:xfrm>
+            <a:off x="7882128" y="3991356"/>
+            <a:ext cx="694944" cy="173736"/>
+          </a:xfrm>
+          <a:prstGeom prst="rect">
+            <a:avLst/>
+          </a:prstGeom>
+          <a:noFill/>
+          <a:ln/>
+        </p:spPr>
+        <p:txBody>
+          <a:bodyPr wrap="square" lIns="0" tIns="0" rIns="0" bIns="0" rtlCol="0" anchor="ctr"/>
+          <a:lstStyle/>
+          <a:p>
+            <a:pPr algn="ctr" indent="0" marL="0">
+              <a:buNone/>
+            </a:pPr>
+            <a:r>
+              <a:rPr lang="en-US" sz="900" b="1" dirty="0">
+                <a:solidFill>
+                  <a:srgbClr val="5A5470"/>
+                </a:solidFill>
+                <a:latin typeface="Plus Jakarta Sans" pitchFamily="34" charset="0"/>
+                <a:ea typeface="Plus Jakarta Sans" pitchFamily="34" charset="-122"/>
+                <a:cs typeface="Plus Jakarta Sans" pitchFamily="34" charset="-120"/>
+              </a:rPr>
+              <a:t>—</a:t>
+            </a:r>
+            <a:endParaRPr lang="en-US" sz="900" dirty="0"/>
+          </a:p>
+        </p:txBody>
+      </p:sp>
+      <p:sp>
+        <p:nvSpPr>
           <p:cNvPr id="61" name="Shape 58"/>
           <p:cNvSpPr/>
           <p:nvPr/>
         </p:nvSpPr>
         <p:spPr>
           <a:xfrm>
-            <a:off x="320040" y="4114800"/>
+            <a:off x="320040" y="4370832"/>
             <a:ext cx="8503920" cy="502920"/>
           </a:xfrm>
           <a:prstGeom prst="roundRect">
@@ -3148,7 +3408,7 @@
         </p:nvSpPr>
         <p:spPr>
           <a:xfrm>
-            <a:off x="548640" y="4114800"/>
+            <a:off x="548640" y="4370832"/>
             <a:ext cx="8046720" cy="502920"/>
           </a:xfrm>
           <a:prstGeom prst="rect">
@@ -3201,7 +3461,7 @@
                 <a:ea typeface="Plus Jakarta Sans" pitchFamily="34" charset="-122"/>
                 <a:cs typeface="Plus Jakarta Sans" pitchFamily="34" charset="-120"/>
               </a:rPr>
-              <a:t>Actual — / Target — · 4 branches · Clinic basis</a:t>
+              <a:t>Actual — / Target — · 5 branches · Clinic basis</a:t>
             </a:r>
             <a:endParaRPr lang="en-US" sz="1200" dirty="0"/>
           </a:p>

--- a/template/Cluster2_Daily_Report_BLANK_Template.pptx
+++ b/template/Cluster2_Daily_Report_BLANK_Template.pptx
@@ -3116,273 +3116,13 @@
       </p:sp>
       <p:sp>
         <p:nvSpPr>
-          <p:cNvPr id="65" name="Text 62"/>
-          <p:cNvSpPr/>
-          <p:nvPr/>
-        </p:nvSpPr>
-        <p:spPr>
-          <a:xfrm>
-            <a:off x="457200" y="3950208"/>
-            <a:ext cx="2240280" cy="256032"/>
-          </a:xfrm>
-          <a:prstGeom prst="rect">
-            <a:avLst/>
-          </a:prstGeom>
-          <a:noFill/>
-          <a:ln/>
-        </p:spPr>
-        <p:txBody>
-          <a:bodyPr wrap="square" lIns="0" tIns="0" rIns="0" bIns="0" rtlCol="0" anchor="ctr"/>
-          <a:lstStyle/>
-          <a:p>
-            <a:pPr indent="0" marL="0">
-              <a:buNone/>
-            </a:pPr>
-            <a:r>
-              <a:rPr lang="en-US" sz="1000" b="1" dirty="0">
-                <a:solidFill>
-                  <a:srgbClr val="1E1A33"/>
-                </a:solidFill>
-                <a:latin typeface="Times New Roman" pitchFamily="34" charset="0"/>
-                <a:ea typeface="Times New Roman" pitchFamily="34" charset="-122"/>
-                <a:cs typeface="Times New Roman" pitchFamily="34" charset="-120"/>
-              </a:rPr>
-              <a:t>Al Khobar</a:t>
-            </a:r>
-            <a:endParaRPr lang="en-US" sz="1000" dirty="0"/>
-          </a:p>
-        </p:txBody>
-      </p:sp>
-      <p:sp>
-        <p:nvSpPr>
-          <p:cNvPr id="66" name="Text 63"/>
-          <p:cNvSpPr/>
-          <p:nvPr/>
-        </p:nvSpPr>
-        <p:spPr>
-          <a:xfrm>
-            <a:off x="2697480" y="3950208"/>
-            <a:ext cx="1234440" cy="256032"/>
-          </a:xfrm>
-          <a:prstGeom prst="rect">
-            <a:avLst/>
-          </a:prstGeom>
-          <a:noFill/>
-          <a:ln/>
-        </p:spPr>
-        <p:txBody>
-          <a:bodyPr wrap="square" lIns="0" tIns="0" rIns="0" bIns="0" rtlCol="0" anchor="ctr"/>
-          <a:lstStyle/>
-          <a:p>
-            <a:pPr algn="ctr" indent="0" marL="0">
-              <a:buNone/>
-            </a:pPr>
-            <a:r>
-              <a:rPr lang="en-US" sz="1000" dirty="0">
-                <a:solidFill>
-                  <a:srgbClr val="5A5470"/>
-                </a:solidFill>
-                <a:latin typeface="Times New Roman" pitchFamily="34" charset="0"/>
-                <a:ea typeface="Times New Roman" pitchFamily="34" charset="-122"/>
-                <a:cs typeface="Times New Roman" pitchFamily="34" charset="-120"/>
-              </a:rPr>
-              <a:t>—</a:t>
-            </a:r>
-            <a:endParaRPr lang="en-US" sz="1000" dirty="0"/>
-          </a:p>
-        </p:txBody>
-      </p:sp>
-      <p:sp>
-        <p:nvSpPr>
-          <p:cNvPr id="67" name="Text 64"/>
-          <p:cNvSpPr/>
-          <p:nvPr/>
-        </p:nvSpPr>
-        <p:spPr>
-          <a:xfrm>
-            <a:off x="3931920" y="3950208"/>
-            <a:ext cx="1234440" cy="256032"/>
-          </a:xfrm>
-          <a:prstGeom prst="rect">
-            <a:avLst/>
-          </a:prstGeom>
-          <a:noFill/>
-          <a:ln/>
-        </p:spPr>
-        <p:txBody>
-          <a:bodyPr wrap="square" lIns="0" tIns="0" rIns="0" bIns="0" rtlCol="0" anchor="ctr"/>
-          <a:lstStyle/>
-          <a:p>
-            <a:pPr algn="ctr" indent="0" marL="0">
-              <a:buNone/>
-            </a:pPr>
-            <a:r>
-              <a:rPr lang="en-US" sz="1000" dirty="0">
-                <a:solidFill>
-                  <a:srgbClr val="5A5470"/>
-                </a:solidFill>
-                <a:latin typeface="Times New Roman" pitchFamily="34" charset="0"/>
-                <a:ea typeface="Times New Roman" pitchFamily="34" charset="-122"/>
-                <a:cs typeface="Times New Roman" pitchFamily="34" charset="-120"/>
-              </a:rPr>
-              <a:t>—</a:t>
-            </a:r>
-            <a:endParaRPr lang="en-US" sz="1000" dirty="0"/>
-          </a:p>
-        </p:txBody>
-      </p:sp>
-      <p:sp>
-        <p:nvSpPr>
-          <p:cNvPr id="68" name="Text 65"/>
-          <p:cNvSpPr/>
-          <p:nvPr/>
-        </p:nvSpPr>
-        <p:spPr>
-          <a:xfrm>
-            <a:off x="5166360" y="3950208"/>
-            <a:ext cx="1234440" cy="256032"/>
-          </a:xfrm>
-          <a:prstGeom prst="rect">
-            <a:avLst/>
-          </a:prstGeom>
-          <a:noFill/>
-          <a:ln/>
-        </p:spPr>
-        <p:txBody>
-          <a:bodyPr wrap="square" lIns="0" tIns="0" rIns="0" bIns="0" rtlCol="0" anchor="ctr"/>
-          <a:lstStyle/>
-          <a:p>
-            <a:pPr algn="ctr" indent="0" marL="0">
-              <a:buNone/>
-            </a:pPr>
-            <a:r>
-              <a:rPr lang="en-US" sz="1000" dirty="0">
-                <a:solidFill>
-                  <a:srgbClr val="5A5470"/>
-                </a:solidFill>
-                <a:latin typeface="Times New Roman" pitchFamily="34" charset="0"/>
-                <a:ea typeface="Times New Roman" pitchFamily="34" charset="-122"/>
-                <a:cs typeface="Times New Roman" pitchFamily="34" charset="-120"/>
-              </a:rPr>
-              <a:t>—</a:t>
-            </a:r>
-            <a:endParaRPr lang="en-US" sz="1000" dirty="0"/>
-          </a:p>
-        </p:txBody>
-      </p:sp>
-      <p:sp>
-        <p:nvSpPr>
-          <p:cNvPr id="69" name="Text 66"/>
-          <p:cNvSpPr/>
-          <p:nvPr/>
-        </p:nvSpPr>
-        <p:spPr>
-          <a:xfrm>
-            <a:off x="6400800" y="3950208"/>
-            <a:ext cx="1234440" cy="256032"/>
-          </a:xfrm>
-          <a:prstGeom prst="rect">
-            <a:avLst/>
-          </a:prstGeom>
-          <a:noFill/>
-          <a:ln/>
-        </p:spPr>
-        <p:txBody>
-          <a:bodyPr wrap="square" lIns="0" tIns="0" rIns="0" bIns="0" rtlCol="0" anchor="ctr"/>
-          <a:lstStyle/>
-          <a:p>
-            <a:pPr algn="ctr" indent="0" marL="0">
-              <a:buNone/>
-            </a:pPr>
-            <a:r>
-              <a:rPr lang="en-US" sz="1000" dirty="0">
-                <a:solidFill>
-                  <a:srgbClr val="5A5470"/>
-                </a:solidFill>
-                <a:latin typeface="Times New Roman" pitchFamily="34" charset="0"/>
-                <a:ea typeface="Times New Roman" pitchFamily="34" charset="-122"/>
-                <a:cs typeface="Times New Roman" pitchFamily="34" charset="-120"/>
-              </a:rPr>
-              <a:t>—</a:t>
-            </a:r>
-            <a:endParaRPr lang="en-US" sz="1000" dirty="0"/>
-          </a:p>
-        </p:txBody>
-      </p:sp>
-      <p:sp>
-        <p:nvSpPr>
-          <p:cNvPr id="70" name="Shape 67"/>
-          <p:cNvSpPr/>
-          <p:nvPr/>
-        </p:nvSpPr>
-        <p:spPr>
-          <a:xfrm>
-            <a:off x="7882128" y="3991356"/>
-            <a:ext cx="694944" cy="173736"/>
-          </a:xfrm>
-          <a:prstGeom prst="roundRect">
-            <a:avLst>
-              <a:gd name="adj" fmla="val 47368"/>
-            </a:avLst>
-          </a:prstGeom>
-          <a:solidFill>
-            <a:srgbClr val="D7D2E9"/>
-          </a:solidFill>
-          <a:ln/>
-        </p:spPr>
-        <p:txBody>
-          <a:bodyPr/>
-          <a:p/>
-        </p:txBody>
-      </p:sp>
-      <p:sp>
-        <p:nvSpPr>
-          <p:cNvPr id="71" name="Text 68"/>
-          <p:cNvSpPr/>
-          <p:nvPr/>
-        </p:nvSpPr>
-        <p:spPr>
-          <a:xfrm>
-            <a:off x="7882128" y="3991356"/>
-            <a:ext cx="694944" cy="173736"/>
-          </a:xfrm>
-          <a:prstGeom prst="rect">
-            <a:avLst/>
-          </a:prstGeom>
-          <a:noFill/>
-          <a:ln/>
-        </p:spPr>
-        <p:txBody>
-          <a:bodyPr wrap="square" lIns="0" tIns="0" rIns="0" bIns="0" rtlCol="0" anchor="ctr"/>
-          <a:lstStyle/>
-          <a:p>
-            <a:pPr algn="ctr" indent="0" marL="0">
-              <a:buNone/>
-            </a:pPr>
-            <a:r>
-              <a:rPr lang="en-US" sz="900" b="1" dirty="0">
-                <a:solidFill>
-                  <a:srgbClr val="5A5470"/>
-                </a:solidFill>
-                <a:latin typeface="Plus Jakarta Sans" pitchFamily="34" charset="0"/>
-                <a:ea typeface="Plus Jakarta Sans" pitchFamily="34" charset="-122"/>
-                <a:cs typeface="Plus Jakarta Sans" pitchFamily="34" charset="-120"/>
-              </a:rPr>
-              <a:t>—</a:t>
-            </a:r>
-            <a:endParaRPr lang="en-US" sz="900" dirty="0"/>
-          </a:p>
-        </p:txBody>
-      </p:sp>
-      <p:sp>
-        <p:nvSpPr>
           <p:cNvPr id="61" name="Shape 58"/>
           <p:cNvSpPr/>
           <p:nvPr/>
         </p:nvSpPr>
         <p:spPr>
           <a:xfrm>
-            <a:off x="320040" y="4370832"/>
+            <a:off x="320040" y="4114800"/>
             <a:ext cx="8503920" cy="502920"/>
           </a:xfrm>
           <a:prstGeom prst="roundRect">
@@ -3408,7 +3148,7 @@
         </p:nvSpPr>
         <p:spPr>
           <a:xfrm>
-            <a:off x="548640" y="4370832"/>
+            <a:off x="548640" y="4114800"/>
             <a:ext cx="8046720" cy="502920"/>
           </a:xfrm>
           <a:prstGeom prst="rect">
@@ -3461,7 +3201,7 @@
                 <a:ea typeface="Plus Jakarta Sans" pitchFamily="34" charset="-122"/>
                 <a:cs typeface="Plus Jakarta Sans" pitchFamily="34" charset="-120"/>
               </a:rPr>
-              <a:t>Actual — / Target — · 5 branches · Clinic basis</a:t>
+              <a:t>Actual — / Target — · 4 branches · Clinic basis</a:t>
             </a:r>
             <a:endParaRPr lang="en-US" sz="1200" dirty="0"/>
           </a:p>
